--- a/docs/pptx/entire/ritu-entire-linsubhr-disc-grade2.pptx
+++ b/docs/pptx/entire/ritu-entire-linsubhr-disc-grade2.pptx
@@ -3045,612 +3045,612 @@
           </p:nvSpPr>
           <p:spPr>
             <a:xfrm>
-              <a:off x="1172049" y="3155882"/>
-              <a:ext cx="7090630" cy="1907538"/>
+              <a:off x="1172049" y="3148168"/>
+              <a:ext cx="7090630" cy="1916024"/>
             </a:xfrm>
             <a:custGeom>
               <a:avLst/>
               <a:pathLst>
-                <a:path w="7090630" h="1907538">
+                <a:path w="7090630" h="1916024">
                   <a:moveTo>
                     <a:pt x="0" y="0"/>
                   </a:moveTo>
                   <a:lnTo>
-                    <a:pt x="71622" y="38058"/>
-                  </a:lnTo>
-                  <a:lnTo>
-                    <a:pt x="143245" y="75514"/>
-                  </a:lnTo>
-                  <a:lnTo>
-                    <a:pt x="214867" y="112376"/>
-                  </a:lnTo>
-                  <a:lnTo>
-                    <a:pt x="286490" y="148654"/>
-                  </a:lnTo>
-                  <a:lnTo>
-                    <a:pt x="358112" y="184357"/>
-                  </a:lnTo>
-                  <a:lnTo>
-                    <a:pt x="429735" y="219494"/>
-                  </a:lnTo>
-                  <a:lnTo>
-                    <a:pt x="501357" y="254075"/>
-                  </a:lnTo>
-                  <a:lnTo>
-                    <a:pt x="572980" y="288107"/>
-                  </a:lnTo>
-                  <a:lnTo>
-                    <a:pt x="644602" y="321599"/>
-                  </a:lnTo>
-                  <a:lnTo>
-                    <a:pt x="716225" y="354561"/>
-                  </a:lnTo>
-                  <a:lnTo>
-                    <a:pt x="787847" y="387001"/>
-                  </a:lnTo>
-                  <a:lnTo>
-                    <a:pt x="859470" y="418926"/>
-                  </a:lnTo>
-                  <a:lnTo>
-                    <a:pt x="931092" y="450346"/>
-                  </a:lnTo>
-                  <a:lnTo>
-                    <a:pt x="1002715" y="481267"/>
-                  </a:lnTo>
-                  <a:lnTo>
-                    <a:pt x="1074337" y="511699"/>
-                  </a:lnTo>
-                  <a:lnTo>
-                    <a:pt x="1145960" y="541648"/>
-                  </a:lnTo>
-                  <a:lnTo>
-                    <a:pt x="1217582" y="571122"/>
-                  </a:lnTo>
-                  <a:lnTo>
-                    <a:pt x="1289205" y="600130"/>
-                  </a:lnTo>
-                  <a:lnTo>
-                    <a:pt x="1360827" y="628677"/>
-                  </a:lnTo>
-                  <a:lnTo>
-                    <a:pt x="1432450" y="656772"/>
-                  </a:lnTo>
-                  <a:lnTo>
-                    <a:pt x="1504073" y="684422"/>
-                  </a:lnTo>
-                  <a:lnTo>
-                    <a:pt x="1575695" y="711634"/>
-                  </a:lnTo>
-                  <a:lnTo>
-                    <a:pt x="1647318" y="738414"/>
-                  </a:lnTo>
-                  <a:lnTo>
-                    <a:pt x="1718940" y="764770"/>
-                  </a:lnTo>
-                  <a:lnTo>
-                    <a:pt x="1790563" y="790708"/>
-                  </a:lnTo>
-                  <a:lnTo>
-                    <a:pt x="1862185" y="816235"/>
-                  </a:lnTo>
-                  <a:lnTo>
-                    <a:pt x="1933808" y="841358"/>
-                  </a:lnTo>
-                  <a:lnTo>
-                    <a:pt x="2005430" y="866082"/>
-                  </a:lnTo>
-                  <a:lnTo>
-                    <a:pt x="2077053" y="890415"/>
-                  </a:lnTo>
-                  <a:lnTo>
-                    <a:pt x="2148675" y="914362"/>
-                  </a:lnTo>
-                  <a:lnTo>
-                    <a:pt x="2220298" y="937929"/>
-                  </a:lnTo>
-                  <a:lnTo>
-                    <a:pt x="2291920" y="961123"/>
-                  </a:lnTo>
-                  <a:lnTo>
-                    <a:pt x="2363543" y="983949"/>
-                  </a:lnTo>
-                  <a:lnTo>
-                    <a:pt x="2435165" y="1006414"/>
-                  </a:lnTo>
-                  <a:lnTo>
-                    <a:pt x="2506788" y="1028522"/>
-                  </a:lnTo>
-                  <a:lnTo>
-                    <a:pt x="2578410" y="1050280"/>
-                  </a:lnTo>
-                  <a:lnTo>
-                    <a:pt x="2650033" y="1071693"/>
-                  </a:lnTo>
-                  <a:lnTo>
-                    <a:pt x="2721655" y="1092767"/>
-                  </a:lnTo>
-                  <a:lnTo>
-                    <a:pt x="2793278" y="1113507"/>
-                  </a:lnTo>
-                  <a:lnTo>
-                    <a:pt x="2864901" y="1133918"/>
-                  </a:lnTo>
-                  <a:lnTo>
-                    <a:pt x="2936523" y="1154006"/>
-                  </a:lnTo>
-                  <a:lnTo>
-                    <a:pt x="3008146" y="1173775"/>
-                  </a:lnTo>
-                  <a:lnTo>
-                    <a:pt x="3079768" y="1193231"/>
-                  </a:lnTo>
-                  <a:lnTo>
-                    <a:pt x="3151391" y="1212378"/>
-                  </a:lnTo>
-                  <a:lnTo>
-                    <a:pt x="3223013" y="1231223"/>
-                  </a:lnTo>
-                  <a:lnTo>
-                    <a:pt x="3294636" y="1249768"/>
-                  </a:lnTo>
-                  <a:lnTo>
-                    <a:pt x="3366258" y="1268020"/>
-                  </a:lnTo>
-                  <a:lnTo>
-                    <a:pt x="3437881" y="1285982"/>
-                  </a:lnTo>
-                  <a:lnTo>
-                    <a:pt x="3509503" y="1303659"/>
-                  </a:lnTo>
-                  <a:lnTo>
-                    <a:pt x="3581126" y="1321057"/>
-                  </a:lnTo>
-                  <a:lnTo>
-                    <a:pt x="3652748" y="1338179"/>
-                  </a:lnTo>
-                  <a:lnTo>
-                    <a:pt x="3724371" y="1355029"/>
-                  </a:lnTo>
-                  <a:lnTo>
-                    <a:pt x="3795993" y="1371612"/>
-                  </a:lnTo>
-                  <a:lnTo>
-                    <a:pt x="3867616" y="1387933"/>
-                  </a:lnTo>
-                  <a:lnTo>
-                    <a:pt x="3939238" y="1403994"/>
-                  </a:lnTo>
-                  <a:lnTo>
-                    <a:pt x="4010861" y="1419802"/>
-                  </a:lnTo>
-                  <a:lnTo>
-                    <a:pt x="4082483" y="1435358"/>
-                  </a:lnTo>
-                  <a:lnTo>
-                    <a:pt x="4154106" y="1450668"/>
-                  </a:lnTo>
-                  <a:lnTo>
-                    <a:pt x="4225729" y="1465736"/>
-                  </a:lnTo>
-                  <a:lnTo>
-                    <a:pt x="4297351" y="1480565"/>
-                  </a:lnTo>
-                  <a:lnTo>
-                    <a:pt x="4368974" y="1495158"/>
-                  </a:lnTo>
-                  <a:lnTo>
-                    <a:pt x="4440596" y="1509521"/>
-                  </a:lnTo>
-                  <a:lnTo>
-                    <a:pt x="4512219" y="1523655"/>
-                  </a:lnTo>
-                  <a:lnTo>
-                    <a:pt x="4583841" y="1537566"/>
-                  </a:lnTo>
-                  <a:lnTo>
-                    <a:pt x="4655464" y="1551256"/>
-                  </a:lnTo>
-                  <a:lnTo>
-                    <a:pt x="4727086" y="1564730"/>
-                  </a:lnTo>
-                  <a:lnTo>
-                    <a:pt x="4798709" y="1574147"/>
-                  </a:lnTo>
-                  <a:lnTo>
-                    <a:pt x="4870331" y="1578992"/>
-                  </a:lnTo>
-                  <a:lnTo>
-                    <a:pt x="4941954" y="1583809"/>
-                  </a:lnTo>
-                  <a:lnTo>
-                    <a:pt x="5013576" y="1588598"/>
-                  </a:lnTo>
-                  <a:lnTo>
-                    <a:pt x="5085199" y="1593359"/>
-                  </a:lnTo>
-                  <a:lnTo>
-                    <a:pt x="5156821" y="1598092"/>
-                  </a:lnTo>
-                  <a:lnTo>
-                    <a:pt x="5228444" y="1602797"/>
-                  </a:lnTo>
-                  <a:lnTo>
-                    <a:pt x="5300066" y="1607475"/>
-                  </a:lnTo>
-                  <a:lnTo>
-                    <a:pt x="5371689" y="1612125"/>
-                  </a:lnTo>
-                  <a:lnTo>
-                    <a:pt x="5443311" y="1616748"/>
-                  </a:lnTo>
-                  <a:lnTo>
-                    <a:pt x="5514934" y="1621344"/>
-                  </a:lnTo>
-                  <a:lnTo>
-                    <a:pt x="5586557" y="1625913"/>
-                  </a:lnTo>
-                  <a:lnTo>
-                    <a:pt x="5658179" y="1630455"/>
-                  </a:lnTo>
-                  <a:lnTo>
-                    <a:pt x="5729802" y="1634971"/>
-                  </a:lnTo>
-                  <a:lnTo>
-                    <a:pt x="5801424" y="1639460"/>
-                  </a:lnTo>
-                  <a:lnTo>
-                    <a:pt x="5873047" y="1643923"/>
-                  </a:lnTo>
-                  <a:lnTo>
-                    <a:pt x="5944669" y="1648360"/>
-                  </a:lnTo>
-                  <a:lnTo>
-                    <a:pt x="6016292" y="1652771"/>
-                  </a:lnTo>
-                  <a:lnTo>
-                    <a:pt x="6087914" y="1657156"/>
-                  </a:lnTo>
-                  <a:lnTo>
-                    <a:pt x="6159537" y="1661515"/>
-                  </a:lnTo>
-                  <a:lnTo>
-                    <a:pt x="6231159" y="1665849"/>
-                  </a:lnTo>
-                  <a:lnTo>
-                    <a:pt x="6302782" y="1670157"/>
-                  </a:lnTo>
-                  <a:lnTo>
-                    <a:pt x="6374404" y="1674440"/>
-                  </a:lnTo>
-                  <a:lnTo>
-                    <a:pt x="6446027" y="1678698"/>
-                  </a:lnTo>
-                  <a:lnTo>
-                    <a:pt x="6517649" y="1682931"/>
-                  </a:lnTo>
-                  <a:lnTo>
-                    <a:pt x="6589272" y="1687139"/>
-                  </a:lnTo>
-                  <a:lnTo>
-                    <a:pt x="6660894" y="1691323"/>
-                  </a:lnTo>
-                  <a:lnTo>
-                    <a:pt x="6732517" y="1695482"/>
-                  </a:lnTo>
-                  <a:lnTo>
-                    <a:pt x="6804139" y="1699617"/>
-                  </a:lnTo>
-                  <a:lnTo>
-                    <a:pt x="6875762" y="1703728"/>
-                  </a:lnTo>
-                  <a:lnTo>
-                    <a:pt x="6947385" y="1707814"/>
-                  </a:lnTo>
-                  <a:lnTo>
-                    <a:pt x="7019007" y="1711877"/>
-                  </a:lnTo>
-                  <a:lnTo>
-                    <a:pt x="7090630" y="1715915"/>
-                  </a:lnTo>
-                  <a:lnTo>
-                    <a:pt x="7090630" y="1907538"/>
-                  </a:lnTo>
-                  <a:lnTo>
-                    <a:pt x="7019007" y="1899585"/>
-                  </a:lnTo>
-                  <a:lnTo>
-                    <a:pt x="6947385" y="1891505"/>
-                  </a:lnTo>
-                  <a:lnTo>
-                    <a:pt x="6875762" y="1883294"/>
-                  </a:lnTo>
-                  <a:lnTo>
-                    <a:pt x="6804139" y="1874951"/>
-                  </a:lnTo>
-                  <a:lnTo>
-                    <a:pt x="6732517" y="1866473"/>
-                  </a:lnTo>
-                  <a:lnTo>
-                    <a:pt x="6660894" y="1857859"/>
-                  </a:lnTo>
-                  <a:lnTo>
-                    <a:pt x="6589272" y="1849107"/>
-                  </a:lnTo>
-                  <a:lnTo>
-                    <a:pt x="6517649" y="1840213"/>
-                  </a:lnTo>
-                  <a:lnTo>
-                    <a:pt x="6446027" y="1831176"/>
-                  </a:lnTo>
-                  <a:lnTo>
-                    <a:pt x="6374404" y="1821994"/>
-                  </a:lnTo>
-                  <a:lnTo>
-                    <a:pt x="6302782" y="1812663"/>
-                  </a:lnTo>
-                  <a:lnTo>
-                    <a:pt x="6231159" y="1803183"/>
-                  </a:lnTo>
-                  <a:lnTo>
-                    <a:pt x="6159537" y="1793550"/>
-                  </a:lnTo>
-                  <a:lnTo>
-                    <a:pt x="6087914" y="1783761"/>
-                  </a:lnTo>
-                  <a:lnTo>
-                    <a:pt x="6016292" y="1773815"/>
-                  </a:lnTo>
-                  <a:lnTo>
-                    <a:pt x="5944669" y="1763709"/>
-                  </a:lnTo>
-                  <a:lnTo>
-                    <a:pt x="5873047" y="1753440"/>
-                  </a:lnTo>
-                  <a:lnTo>
-                    <a:pt x="5801424" y="1743006"/>
-                  </a:lnTo>
-                  <a:lnTo>
-                    <a:pt x="5729802" y="1732404"/>
-                  </a:lnTo>
-                  <a:lnTo>
-                    <a:pt x="5658179" y="1721631"/>
-                  </a:lnTo>
-                  <a:lnTo>
-                    <a:pt x="5586557" y="1710684"/>
-                  </a:lnTo>
-                  <a:lnTo>
-                    <a:pt x="5514934" y="1699561"/>
-                  </a:lnTo>
-                  <a:lnTo>
-                    <a:pt x="5443311" y="1688259"/>
-                  </a:lnTo>
-                  <a:lnTo>
-                    <a:pt x="5371689" y="1676775"/>
-                  </a:lnTo>
-                  <a:lnTo>
-                    <a:pt x="5300066" y="1665106"/>
-                  </a:lnTo>
-                  <a:lnTo>
-                    <a:pt x="5228444" y="1653250"/>
-                  </a:lnTo>
-                  <a:lnTo>
-                    <a:pt x="5156821" y="1641202"/>
-                  </a:lnTo>
-                  <a:lnTo>
-                    <a:pt x="5085199" y="1628960"/>
-                  </a:lnTo>
-                  <a:lnTo>
-                    <a:pt x="5013576" y="1616521"/>
-                  </a:lnTo>
-                  <a:lnTo>
-                    <a:pt x="4941954" y="1603882"/>
-                  </a:lnTo>
-                  <a:lnTo>
-                    <a:pt x="4870331" y="1591039"/>
-                  </a:lnTo>
-                  <a:lnTo>
-                    <a:pt x="4798709" y="1577990"/>
-                  </a:lnTo>
-                  <a:lnTo>
-                    <a:pt x="4727086" y="1569273"/>
-                  </a:lnTo>
-                  <a:lnTo>
-                    <a:pt x="4655464" y="1564370"/>
-                  </a:lnTo>
-                  <a:lnTo>
-                    <a:pt x="4583841" y="1559438"/>
-                  </a:lnTo>
-                  <a:lnTo>
-                    <a:pt x="4512219" y="1554478"/>
-                  </a:lnTo>
-                  <a:lnTo>
-                    <a:pt x="4440596" y="1549488"/>
-                  </a:lnTo>
-                  <a:lnTo>
-                    <a:pt x="4368974" y="1544468"/>
-                  </a:lnTo>
-                  <a:lnTo>
-                    <a:pt x="4297351" y="1539419"/>
-                  </a:lnTo>
-                  <a:lnTo>
-                    <a:pt x="4225729" y="1534341"/>
-                  </a:lnTo>
-                  <a:lnTo>
-                    <a:pt x="4154106" y="1529232"/>
-                  </a:lnTo>
-                  <a:lnTo>
-                    <a:pt x="4082483" y="1524094"/>
-                  </a:lnTo>
-                  <a:lnTo>
-                    <a:pt x="4010861" y="1518925"/>
-                  </a:lnTo>
-                  <a:lnTo>
-                    <a:pt x="3939238" y="1513725"/>
-                  </a:lnTo>
-                  <a:lnTo>
-                    <a:pt x="3867616" y="1508495"/>
-                  </a:lnTo>
-                  <a:lnTo>
-                    <a:pt x="3795993" y="1503234"/>
-                  </a:lnTo>
-                  <a:lnTo>
-                    <a:pt x="3724371" y="1497942"/>
-                  </a:lnTo>
-                  <a:lnTo>
-                    <a:pt x="3652748" y="1492619"/>
-                  </a:lnTo>
-                  <a:lnTo>
-                    <a:pt x="3581126" y="1487265"/>
-                  </a:lnTo>
-                  <a:lnTo>
-                    <a:pt x="3509503" y="1481879"/>
-                  </a:lnTo>
-                  <a:lnTo>
-                    <a:pt x="3437881" y="1476461"/>
-                  </a:lnTo>
-                  <a:lnTo>
-                    <a:pt x="3366258" y="1471012"/>
-                  </a:lnTo>
-                  <a:lnTo>
-                    <a:pt x="3294636" y="1465530"/>
-                  </a:lnTo>
-                  <a:lnTo>
-                    <a:pt x="3223013" y="1460016"/>
-                  </a:lnTo>
-                  <a:lnTo>
-                    <a:pt x="3151391" y="1454470"/>
-                  </a:lnTo>
-                  <a:lnTo>
-                    <a:pt x="3079768" y="1448890"/>
-                  </a:lnTo>
-                  <a:lnTo>
-                    <a:pt x="3008146" y="1443278"/>
-                  </a:lnTo>
-                  <a:lnTo>
-                    <a:pt x="2936523" y="1437633"/>
-                  </a:lnTo>
-                  <a:lnTo>
-                    <a:pt x="2864901" y="1431955"/>
-                  </a:lnTo>
-                  <a:lnTo>
-                    <a:pt x="2793278" y="1426243"/>
-                  </a:lnTo>
-                  <a:lnTo>
-                    <a:pt x="2721655" y="1420497"/>
-                  </a:lnTo>
-                  <a:lnTo>
-                    <a:pt x="2650033" y="1414718"/>
-                  </a:lnTo>
-                  <a:lnTo>
-                    <a:pt x="2578410" y="1408905"/>
-                  </a:lnTo>
-                  <a:lnTo>
-                    <a:pt x="2506788" y="1403057"/>
-                  </a:lnTo>
-                  <a:lnTo>
-                    <a:pt x="2435165" y="1397175"/>
-                  </a:lnTo>
-                  <a:lnTo>
-                    <a:pt x="2363543" y="1391258"/>
-                  </a:lnTo>
-                  <a:lnTo>
-                    <a:pt x="2291920" y="1385307"/>
-                  </a:lnTo>
-                  <a:lnTo>
-                    <a:pt x="2220298" y="1379320"/>
-                  </a:lnTo>
-                  <a:lnTo>
-                    <a:pt x="2148675" y="1373298"/>
-                  </a:lnTo>
-                  <a:lnTo>
-                    <a:pt x="2077053" y="1367240"/>
-                  </a:lnTo>
-                  <a:lnTo>
-                    <a:pt x="2005430" y="1361147"/>
-                  </a:lnTo>
-                  <a:lnTo>
-                    <a:pt x="1933808" y="1355018"/>
-                  </a:lnTo>
-                  <a:lnTo>
-                    <a:pt x="1862185" y="1348853"/>
-                  </a:lnTo>
-                  <a:lnTo>
-                    <a:pt x="1790563" y="1342652"/>
-                  </a:lnTo>
-                  <a:lnTo>
-                    <a:pt x="1718940" y="1336414"/>
-                  </a:lnTo>
-                  <a:lnTo>
-                    <a:pt x="1647318" y="1330139"/>
-                  </a:lnTo>
-                  <a:lnTo>
-                    <a:pt x="1575695" y="1323827"/>
-                  </a:lnTo>
-                  <a:lnTo>
-                    <a:pt x="1504073" y="1317478"/>
-                  </a:lnTo>
-                  <a:lnTo>
-                    <a:pt x="1432450" y="1311092"/>
-                  </a:lnTo>
-                  <a:lnTo>
-                    <a:pt x="1360827" y="1304668"/>
-                  </a:lnTo>
-                  <a:lnTo>
-                    <a:pt x="1289205" y="1298206"/>
-                  </a:lnTo>
-                  <a:lnTo>
-                    <a:pt x="1217582" y="1291706"/>
-                  </a:lnTo>
-                  <a:lnTo>
-                    <a:pt x="1145960" y="1285168"/>
-                  </a:lnTo>
-                  <a:lnTo>
-                    <a:pt x="1074337" y="1278591"/>
-                  </a:lnTo>
-                  <a:lnTo>
-                    <a:pt x="1002715" y="1271976"/>
-                  </a:lnTo>
-                  <a:lnTo>
-                    <a:pt x="931092" y="1265321"/>
-                  </a:lnTo>
-                  <a:lnTo>
-                    <a:pt x="859470" y="1258628"/>
-                  </a:lnTo>
-                  <a:lnTo>
-                    <a:pt x="787847" y="1251894"/>
-                  </a:lnTo>
-                  <a:lnTo>
-                    <a:pt x="716225" y="1245122"/>
-                  </a:lnTo>
-                  <a:lnTo>
-                    <a:pt x="644602" y="1238309"/>
-                  </a:lnTo>
-                  <a:lnTo>
-                    <a:pt x="572980" y="1231456"/>
-                  </a:lnTo>
-                  <a:lnTo>
-                    <a:pt x="501357" y="1224563"/>
-                  </a:lnTo>
-                  <a:lnTo>
-                    <a:pt x="429735" y="1217629"/>
-                  </a:lnTo>
-                  <a:lnTo>
-                    <a:pt x="358112" y="1210655"/>
-                  </a:lnTo>
-                  <a:lnTo>
-                    <a:pt x="286490" y="1203639"/>
-                  </a:lnTo>
-                  <a:lnTo>
-                    <a:pt x="214867" y="1196582"/>
-                  </a:lnTo>
-                  <a:lnTo>
-                    <a:pt x="143245" y="1189483"/>
-                  </a:lnTo>
-                  <a:lnTo>
-                    <a:pt x="71622" y="1182342"/>
-                  </a:lnTo>
-                  <a:lnTo>
-                    <a:pt x="0" y="1175160"/>
+                    <a:pt x="71622" y="38295"/>
+                  </a:lnTo>
+                  <a:lnTo>
+                    <a:pt x="143245" y="75982"/>
+                  </a:lnTo>
+                  <a:lnTo>
+                    <a:pt x="214867" y="113069"/>
+                  </a:lnTo>
+                  <a:lnTo>
+                    <a:pt x="286490" y="149567"/>
+                  </a:lnTo>
+                  <a:lnTo>
+                    <a:pt x="358112" y="185485"/>
+                  </a:lnTo>
+                  <a:lnTo>
+                    <a:pt x="429735" y="220832"/>
+                  </a:lnTo>
+                  <a:lnTo>
+                    <a:pt x="501357" y="255617"/>
+                  </a:lnTo>
+                  <a:lnTo>
+                    <a:pt x="572980" y="289849"/>
+                  </a:lnTo>
+                  <a:lnTo>
+                    <a:pt x="644602" y="323537"/>
+                  </a:lnTo>
+                  <a:lnTo>
+                    <a:pt x="716225" y="356690"/>
+                  </a:lnTo>
+                  <a:lnTo>
+                    <a:pt x="787847" y="389315"/>
+                  </a:lnTo>
+                  <a:lnTo>
+                    <a:pt x="859470" y="421422"/>
+                  </a:lnTo>
+                  <a:lnTo>
+                    <a:pt x="931092" y="453018"/>
+                  </a:lnTo>
+                  <a:lnTo>
+                    <a:pt x="1002715" y="484113"/>
+                  </a:lnTo>
+                  <a:lnTo>
+                    <a:pt x="1074337" y="514712"/>
+                  </a:lnTo>
+                  <a:lnTo>
+                    <a:pt x="1145960" y="544826"/>
+                  </a:lnTo>
+                  <a:lnTo>
+                    <a:pt x="1217582" y="574461"/>
+                  </a:lnTo>
+                  <a:lnTo>
+                    <a:pt x="1289205" y="603624"/>
+                  </a:lnTo>
+                  <a:lnTo>
+                    <a:pt x="1360827" y="632324"/>
+                  </a:lnTo>
+                  <a:lnTo>
+                    <a:pt x="1432450" y="660568"/>
+                  </a:lnTo>
+                  <a:lnTo>
+                    <a:pt x="1504073" y="688363"/>
+                  </a:lnTo>
+                  <a:lnTo>
+                    <a:pt x="1575695" y="715716"/>
+                  </a:lnTo>
+                  <a:lnTo>
+                    <a:pt x="1647318" y="742634"/>
+                  </a:lnTo>
+                  <a:lnTo>
+                    <a:pt x="1718940" y="769125"/>
+                  </a:lnTo>
+                  <a:lnTo>
+                    <a:pt x="1790563" y="795194"/>
+                  </a:lnTo>
+                  <a:lnTo>
+                    <a:pt x="1862185" y="820849"/>
+                  </a:lnTo>
+                  <a:lnTo>
+                    <a:pt x="1933808" y="846096"/>
+                  </a:lnTo>
+                  <a:lnTo>
+                    <a:pt x="2005430" y="870942"/>
+                  </a:lnTo>
+                  <a:lnTo>
+                    <a:pt x="2077053" y="895392"/>
+                  </a:lnTo>
+                  <a:lnTo>
+                    <a:pt x="2148675" y="919454"/>
+                  </a:lnTo>
+                  <a:lnTo>
+                    <a:pt x="2220298" y="943134"/>
+                  </a:lnTo>
+                  <a:lnTo>
+                    <a:pt x="2291920" y="966437"/>
+                  </a:lnTo>
+                  <a:lnTo>
+                    <a:pt x="2363543" y="989370"/>
+                  </a:lnTo>
+                  <a:lnTo>
+                    <a:pt x="2435165" y="1011938"/>
+                  </a:lnTo>
+                  <a:lnTo>
+                    <a:pt x="2506788" y="1034147"/>
+                  </a:lnTo>
+                  <a:lnTo>
+                    <a:pt x="2578410" y="1056004"/>
+                  </a:lnTo>
+                  <a:lnTo>
+                    <a:pt x="2650033" y="1077513"/>
+                  </a:lnTo>
+                  <a:lnTo>
+                    <a:pt x="2721655" y="1098680"/>
+                  </a:lnTo>
+                  <a:lnTo>
+                    <a:pt x="2793278" y="1119510"/>
+                  </a:lnTo>
+                  <a:lnTo>
+                    <a:pt x="2864901" y="1140009"/>
+                  </a:lnTo>
+                  <a:lnTo>
+                    <a:pt x="2936523" y="1160183"/>
+                  </a:lnTo>
+                  <a:lnTo>
+                    <a:pt x="3008146" y="1180036"/>
+                  </a:lnTo>
+                  <a:lnTo>
+                    <a:pt x="3079768" y="1199573"/>
+                  </a:lnTo>
+                  <a:lnTo>
+                    <a:pt x="3151391" y="1218800"/>
+                  </a:lnTo>
+                  <a:lnTo>
+                    <a:pt x="3223013" y="1237721"/>
+                  </a:lnTo>
+                  <a:lnTo>
+                    <a:pt x="3294636" y="1256341"/>
+                  </a:lnTo>
+                  <a:lnTo>
+                    <a:pt x="3366258" y="1274666"/>
+                  </a:lnTo>
+                  <a:lnTo>
+                    <a:pt x="3437881" y="1292699"/>
+                  </a:lnTo>
+                  <a:lnTo>
+                    <a:pt x="3509503" y="1310445"/>
+                  </a:lnTo>
+                  <a:lnTo>
+                    <a:pt x="3581126" y="1327909"/>
+                  </a:lnTo>
+                  <a:lnTo>
+                    <a:pt x="3652748" y="1345096"/>
+                  </a:lnTo>
+                  <a:lnTo>
+                    <a:pt x="3724371" y="1362009"/>
+                  </a:lnTo>
+                  <a:lnTo>
+                    <a:pt x="3795993" y="1378654"/>
+                  </a:lnTo>
+                  <a:lnTo>
+                    <a:pt x="3867616" y="1395034"/>
+                  </a:lnTo>
+                  <a:lnTo>
+                    <a:pt x="3939238" y="1411153"/>
+                  </a:lnTo>
+                  <a:lnTo>
+                    <a:pt x="4010861" y="1427017"/>
+                  </a:lnTo>
+                  <a:lnTo>
+                    <a:pt x="4082483" y="1442628"/>
+                  </a:lnTo>
+                  <a:lnTo>
+                    <a:pt x="4154106" y="1457991"/>
+                  </a:lnTo>
+                  <a:lnTo>
+                    <a:pt x="4225729" y="1473110"/>
+                  </a:lnTo>
+                  <a:lnTo>
+                    <a:pt x="4297351" y="1487988"/>
+                  </a:lnTo>
+                  <a:lnTo>
+                    <a:pt x="4368974" y="1502630"/>
+                  </a:lnTo>
+                  <a:lnTo>
+                    <a:pt x="4440596" y="1517039"/>
+                  </a:lnTo>
+                  <a:lnTo>
+                    <a:pt x="4512219" y="1531220"/>
+                  </a:lnTo>
+                  <a:lnTo>
+                    <a:pt x="4583841" y="1545174"/>
+                  </a:lnTo>
+                  <a:lnTo>
+                    <a:pt x="4655464" y="1558907"/>
+                  </a:lnTo>
+                  <a:lnTo>
+                    <a:pt x="4727086" y="1572422"/>
+                  </a:lnTo>
+                  <a:lnTo>
+                    <a:pt x="4798709" y="1581880"/>
+                  </a:lnTo>
+                  <a:lnTo>
+                    <a:pt x="4870331" y="1586769"/>
+                  </a:lnTo>
+                  <a:lnTo>
+                    <a:pt x="4941954" y="1591628"/>
+                  </a:lnTo>
+                  <a:lnTo>
+                    <a:pt x="5013576" y="1596459"/>
+                  </a:lnTo>
+                  <a:lnTo>
+                    <a:pt x="5085199" y="1601261"/>
+                  </a:lnTo>
+                  <a:lnTo>
+                    <a:pt x="5156821" y="1606034"/>
+                  </a:lnTo>
+                  <a:lnTo>
+                    <a:pt x="5228444" y="1610780"/>
+                  </a:lnTo>
+                  <a:lnTo>
+                    <a:pt x="5300066" y="1615497"/>
+                  </a:lnTo>
+                  <a:lnTo>
+                    <a:pt x="5371689" y="1620187"/>
+                  </a:lnTo>
+                  <a:lnTo>
+                    <a:pt x="5443311" y="1624849"/>
+                  </a:lnTo>
+                  <a:lnTo>
+                    <a:pt x="5514934" y="1629483"/>
+                  </a:lnTo>
+                  <a:lnTo>
+                    <a:pt x="5586557" y="1634090"/>
+                  </a:lnTo>
+                  <a:lnTo>
+                    <a:pt x="5658179" y="1638670"/>
+                  </a:lnTo>
+                  <a:lnTo>
+                    <a:pt x="5729802" y="1643223"/>
+                  </a:lnTo>
+                  <a:lnTo>
+                    <a:pt x="5801424" y="1647748"/>
+                  </a:lnTo>
+                  <a:lnTo>
+                    <a:pt x="5873047" y="1652247"/>
+                  </a:lnTo>
+                  <a:lnTo>
+                    <a:pt x="5944669" y="1656720"/>
+                  </a:lnTo>
+                  <a:lnTo>
+                    <a:pt x="6016292" y="1661166"/>
+                  </a:lnTo>
+                  <a:lnTo>
+                    <a:pt x="6087914" y="1665585"/>
+                  </a:lnTo>
+                  <a:lnTo>
+                    <a:pt x="6159537" y="1669979"/>
+                  </a:lnTo>
+                  <a:lnTo>
+                    <a:pt x="6231159" y="1674347"/>
+                  </a:lnTo>
+                  <a:lnTo>
+                    <a:pt x="6302782" y="1678689"/>
+                  </a:lnTo>
+                  <a:lnTo>
+                    <a:pt x="6374404" y="1683005"/>
+                  </a:lnTo>
+                  <a:lnTo>
+                    <a:pt x="6446027" y="1687295"/>
+                  </a:lnTo>
+                  <a:lnTo>
+                    <a:pt x="6517649" y="1691561"/>
+                  </a:lnTo>
+                  <a:lnTo>
+                    <a:pt x="6589272" y="1695801"/>
+                  </a:lnTo>
+                  <a:lnTo>
+                    <a:pt x="6660894" y="1700016"/>
+                  </a:lnTo>
+                  <a:lnTo>
+                    <a:pt x="6732517" y="1704206"/>
+                  </a:lnTo>
+                  <a:lnTo>
+                    <a:pt x="6804139" y="1708371"/>
+                  </a:lnTo>
+                  <a:lnTo>
+                    <a:pt x="6875762" y="1712512"/>
+                  </a:lnTo>
+                  <a:lnTo>
+                    <a:pt x="6947385" y="1716628"/>
+                  </a:lnTo>
+                  <a:lnTo>
+                    <a:pt x="7019007" y="1720720"/>
+                  </a:lnTo>
+                  <a:lnTo>
+                    <a:pt x="7090630" y="1724788"/>
+                  </a:lnTo>
+                  <a:lnTo>
+                    <a:pt x="7090630" y="1916024"/>
+                  </a:lnTo>
+                  <a:lnTo>
+                    <a:pt x="7019007" y="1908060"/>
+                  </a:lnTo>
+                  <a:lnTo>
+                    <a:pt x="6947385" y="1899967"/>
+                  </a:lnTo>
+                  <a:lnTo>
+                    <a:pt x="6875762" y="1891743"/>
+                  </a:lnTo>
+                  <a:lnTo>
+                    <a:pt x="6804139" y="1883386"/>
+                  </a:lnTo>
+                  <a:lnTo>
+                    <a:pt x="6732517" y="1874895"/>
+                  </a:lnTo>
+                  <a:lnTo>
+                    <a:pt x="6660894" y="1866266"/>
+                  </a:lnTo>
+                  <a:lnTo>
+                    <a:pt x="6589272" y="1857498"/>
+                  </a:lnTo>
+                  <a:lnTo>
+                    <a:pt x="6517649" y="1848588"/>
+                  </a:lnTo>
+                  <a:lnTo>
+                    <a:pt x="6446027" y="1839534"/>
+                  </a:lnTo>
+                  <a:lnTo>
+                    <a:pt x="6374404" y="1830334"/>
+                  </a:lnTo>
+                  <a:lnTo>
+                    <a:pt x="6302782" y="1820986"/>
+                  </a:lnTo>
+                  <a:lnTo>
+                    <a:pt x="6231159" y="1811486"/>
+                  </a:lnTo>
+                  <a:lnTo>
+                    <a:pt x="6159537" y="1801833"/>
+                  </a:lnTo>
+                  <a:lnTo>
+                    <a:pt x="6087914" y="1792024"/>
+                  </a:lnTo>
+                  <a:lnTo>
+                    <a:pt x="6016292" y="1782057"/>
+                  </a:lnTo>
+                  <a:lnTo>
+                    <a:pt x="5944669" y="1771929"/>
+                  </a:lnTo>
+                  <a:lnTo>
+                    <a:pt x="5873047" y="1761637"/>
+                  </a:lnTo>
+                  <a:lnTo>
+                    <a:pt x="5801424" y="1751178"/>
+                  </a:lnTo>
+                  <a:lnTo>
+                    <a:pt x="5729802" y="1740551"/>
+                  </a:lnTo>
+                  <a:lnTo>
+                    <a:pt x="5658179" y="1729752"/>
+                  </a:lnTo>
+                  <a:lnTo>
+                    <a:pt x="5586557" y="1718779"/>
+                  </a:lnTo>
+                  <a:lnTo>
+                    <a:pt x="5514934" y="1707629"/>
+                  </a:lnTo>
+                  <a:lnTo>
+                    <a:pt x="5443311" y="1696298"/>
+                  </a:lnTo>
+                  <a:lnTo>
+                    <a:pt x="5371689" y="1684784"/>
+                  </a:lnTo>
+                  <a:lnTo>
+                    <a:pt x="5300066" y="1673085"/>
+                  </a:lnTo>
+                  <a:lnTo>
+                    <a:pt x="5228444" y="1661196"/>
+                  </a:lnTo>
+                  <a:lnTo>
+                    <a:pt x="5156821" y="1649116"/>
+                  </a:lnTo>
+                  <a:lnTo>
+                    <a:pt x="5085199" y="1636840"/>
+                  </a:lnTo>
+                  <a:lnTo>
+                    <a:pt x="5013576" y="1624366"/>
+                  </a:lnTo>
+                  <a:lnTo>
+                    <a:pt x="4941954" y="1611690"/>
+                  </a:lnTo>
+                  <a:lnTo>
+                    <a:pt x="4870331" y="1598810"/>
+                  </a:lnTo>
+                  <a:lnTo>
+                    <a:pt x="4798709" y="1585722"/>
+                  </a:lnTo>
+                  <a:lnTo>
+                    <a:pt x="4727086" y="1576963"/>
+                  </a:lnTo>
+                  <a:lnTo>
+                    <a:pt x="4655464" y="1572017"/>
+                  </a:lnTo>
+                  <a:lnTo>
+                    <a:pt x="4583841" y="1567041"/>
+                  </a:lnTo>
+                  <a:lnTo>
+                    <a:pt x="4512219" y="1562035"/>
+                  </a:lnTo>
+                  <a:lnTo>
+                    <a:pt x="4440596" y="1557000"/>
+                  </a:lnTo>
+                  <a:lnTo>
+                    <a:pt x="4368974" y="1551935"/>
+                  </a:lnTo>
+                  <a:lnTo>
+                    <a:pt x="4297351" y="1546839"/>
+                  </a:lnTo>
+                  <a:lnTo>
+                    <a:pt x="4225729" y="1541714"/>
+                  </a:lnTo>
+                  <a:lnTo>
+                    <a:pt x="4154106" y="1536558"/>
+                  </a:lnTo>
+                  <a:lnTo>
+                    <a:pt x="4082483" y="1531371"/>
+                  </a:lnTo>
+                  <a:lnTo>
+                    <a:pt x="4010861" y="1526153"/>
+                  </a:lnTo>
+                  <a:lnTo>
+                    <a:pt x="3939238" y="1520905"/>
+                  </a:lnTo>
+                  <a:lnTo>
+                    <a:pt x="3867616" y="1515625"/>
+                  </a:lnTo>
+                  <a:lnTo>
+                    <a:pt x="3795993" y="1510314"/>
+                  </a:lnTo>
+                  <a:lnTo>
+                    <a:pt x="3724371" y="1504971"/>
+                  </a:lnTo>
+                  <a:lnTo>
+                    <a:pt x="3652748" y="1499597"/>
+                  </a:lnTo>
+                  <a:lnTo>
+                    <a:pt x="3581126" y="1494190"/>
+                  </a:lnTo>
+                  <a:lnTo>
+                    <a:pt x="3509503" y="1488751"/>
+                  </a:lnTo>
+                  <a:lnTo>
+                    <a:pt x="3437881" y="1483281"/>
+                  </a:lnTo>
+                  <a:lnTo>
+                    <a:pt x="3366258" y="1477777"/>
+                  </a:lnTo>
+                  <a:lnTo>
+                    <a:pt x="3294636" y="1472241"/>
+                  </a:lnTo>
+                  <a:lnTo>
+                    <a:pt x="3223013" y="1466672"/>
+                  </a:lnTo>
+                  <a:lnTo>
+                    <a:pt x="3151391" y="1461070"/>
+                  </a:lnTo>
+                  <a:lnTo>
+                    <a:pt x="3079768" y="1455434"/>
+                  </a:lnTo>
+                  <a:lnTo>
+                    <a:pt x="3008146" y="1449765"/>
+                  </a:lnTo>
+                  <a:lnTo>
+                    <a:pt x="2936523" y="1444063"/>
+                  </a:lnTo>
+                  <a:lnTo>
+                    <a:pt x="2864901" y="1438326"/>
+                  </a:lnTo>
+                  <a:lnTo>
+                    <a:pt x="2793278" y="1432555"/>
+                  </a:lnTo>
+                  <a:lnTo>
+                    <a:pt x="2721655" y="1426750"/>
+                  </a:lnTo>
+                  <a:lnTo>
+                    <a:pt x="2650033" y="1420911"/>
+                  </a:lnTo>
+                  <a:lnTo>
+                    <a:pt x="2578410" y="1415037"/>
+                  </a:lnTo>
+                  <a:lnTo>
+                    <a:pt x="2506788" y="1409128"/>
+                  </a:lnTo>
+                  <a:lnTo>
+                    <a:pt x="2435165" y="1403183"/>
+                  </a:lnTo>
+                  <a:lnTo>
+                    <a:pt x="2363543" y="1397204"/>
+                  </a:lnTo>
+                  <a:lnTo>
+                    <a:pt x="2291920" y="1391189"/>
+                  </a:lnTo>
+                  <a:lnTo>
+                    <a:pt x="2220298" y="1385138"/>
+                  </a:lnTo>
+                  <a:lnTo>
+                    <a:pt x="2148675" y="1379051"/>
+                  </a:lnTo>
+                  <a:lnTo>
+                    <a:pt x="2077053" y="1372928"/>
+                  </a:lnTo>
+                  <a:lnTo>
+                    <a:pt x="2005430" y="1366769"/>
+                  </a:lnTo>
+                  <a:lnTo>
+                    <a:pt x="1933808" y="1360572"/>
+                  </a:lnTo>
+                  <a:lnTo>
+                    <a:pt x="1862185" y="1354340"/>
+                  </a:lnTo>
+                  <a:lnTo>
+                    <a:pt x="1790563" y="1348070"/>
+                  </a:lnTo>
+                  <a:lnTo>
+                    <a:pt x="1718940" y="1341762"/>
+                  </a:lnTo>
+                  <a:lnTo>
+                    <a:pt x="1647318" y="1335418"/>
+                  </a:lnTo>
+                  <a:lnTo>
+                    <a:pt x="1575695" y="1329035"/>
+                  </a:lnTo>
+                  <a:lnTo>
+                    <a:pt x="1504073" y="1322615"/>
+                  </a:lnTo>
+                  <a:lnTo>
+                    <a:pt x="1432450" y="1316156"/>
+                  </a:lnTo>
+                  <a:lnTo>
+                    <a:pt x="1360827" y="1309660"/>
+                  </a:lnTo>
+                  <a:lnTo>
+                    <a:pt x="1289205" y="1303124"/>
+                  </a:lnTo>
+                  <a:lnTo>
+                    <a:pt x="1217582" y="1296550"/>
+                  </a:lnTo>
+                  <a:lnTo>
+                    <a:pt x="1145960" y="1289936"/>
+                  </a:lnTo>
+                  <a:lnTo>
+                    <a:pt x="1074337" y="1283283"/>
+                  </a:lnTo>
+                  <a:lnTo>
+                    <a:pt x="1002715" y="1276591"/>
+                  </a:lnTo>
+                  <a:lnTo>
+                    <a:pt x="931092" y="1269859"/>
+                  </a:lnTo>
+                  <a:lnTo>
+                    <a:pt x="859470" y="1263087"/>
+                  </a:lnTo>
+                  <a:lnTo>
+                    <a:pt x="787847" y="1256274"/>
+                  </a:lnTo>
+                  <a:lnTo>
+                    <a:pt x="716225" y="1249422"/>
+                  </a:lnTo>
+                  <a:lnTo>
+                    <a:pt x="644602" y="1242528"/>
+                  </a:lnTo>
+                  <a:lnTo>
+                    <a:pt x="572980" y="1235593"/>
+                  </a:lnTo>
+                  <a:lnTo>
+                    <a:pt x="501357" y="1228618"/>
+                  </a:lnTo>
+                  <a:lnTo>
+                    <a:pt x="429735" y="1221600"/>
+                  </a:lnTo>
+                  <a:lnTo>
+                    <a:pt x="358112" y="1214541"/>
+                  </a:lnTo>
+                  <a:lnTo>
+                    <a:pt x="286490" y="1207440"/>
+                  </a:lnTo>
+                  <a:lnTo>
+                    <a:pt x="214867" y="1200297"/>
+                  </a:lnTo>
+                  <a:lnTo>
+                    <a:pt x="143245" y="1193112"/>
+                  </a:lnTo>
+                  <a:lnTo>
+                    <a:pt x="71622" y="1185883"/>
+                  </a:lnTo>
+                  <a:lnTo>
+                    <a:pt x="0" y="1178612"/>
                   </a:lnTo>
                   <a:close/>
                 </a:path>
@@ -3676,312 +3676,312 @@
           </p:nvSpPr>
           <p:spPr>
             <a:xfrm>
-              <a:off x="1172049" y="3155882"/>
-              <a:ext cx="7090630" cy="1715915"/>
+              <a:off x="1172049" y="3148168"/>
+              <a:ext cx="7090630" cy="1724788"/>
             </a:xfrm>
             <a:custGeom>
               <a:avLst/>
               <a:pathLst>
-                <a:path w="7090630" h="1715915">
+                <a:path w="7090630" h="1724788">
                   <a:moveTo>
                     <a:pt x="0" y="0"/>
                   </a:moveTo>
                   <a:lnTo>
-                    <a:pt x="71622" y="38058"/>
-                  </a:lnTo>
-                  <a:lnTo>
-                    <a:pt x="143245" y="75514"/>
-                  </a:lnTo>
-                  <a:lnTo>
-                    <a:pt x="214867" y="112376"/>
-                  </a:lnTo>
-                  <a:lnTo>
-                    <a:pt x="286490" y="148654"/>
-                  </a:lnTo>
-                  <a:lnTo>
-                    <a:pt x="358112" y="184357"/>
-                  </a:lnTo>
-                  <a:lnTo>
-                    <a:pt x="429735" y="219494"/>
-                  </a:lnTo>
-                  <a:lnTo>
-                    <a:pt x="501357" y="254075"/>
-                  </a:lnTo>
-                  <a:lnTo>
-                    <a:pt x="572980" y="288107"/>
-                  </a:lnTo>
-                  <a:lnTo>
-                    <a:pt x="644602" y="321599"/>
-                  </a:lnTo>
-                  <a:lnTo>
-                    <a:pt x="716225" y="354561"/>
-                  </a:lnTo>
-                  <a:lnTo>
-                    <a:pt x="787847" y="387001"/>
-                  </a:lnTo>
-                  <a:lnTo>
-                    <a:pt x="859470" y="418926"/>
-                  </a:lnTo>
-                  <a:lnTo>
-                    <a:pt x="931092" y="450346"/>
-                  </a:lnTo>
-                  <a:lnTo>
-                    <a:pt x="1002715" y="481267"/>
-                  </a:lnTo>
-                  <a:lnTo>
-                    <a:pt x="1074337" y="511699"/>
-                  </a:lnTo>
-                  <a:lnTo>
-                    <a:pt x="1145960" y="541648"/>
-                  </a:lnTo>
-                  <a:lnTo>
-                    <a:pt x="1217582" y="571122"/>
-                  </a:lnTo>
-                  <a:lnTo>
-                    <a:pt x="1289205" y="600130"/>
-                  </a:lnTo>
-                  <a:lnTo>
-                    <a:pt x="1360827" y="628677"/>
-                  </a:lnTo>
-                  <a:lnTo>
-                    <a:pt x="1432450" y="656772"/>
-                  </a:lnTo>
-                  <a:lnTo>
-                    <a:pt x="1504073" y="684422"/>
-                  </a:lnTo>
-                  <a:lnTo>
-                    <a:pt x="1575695" y="711634"/>
-                  </a:lnTo>
-                  <a:lnTo>
-                    <a:pt x="1647318" y="738414"/>
-                  </a:lnTo>
-                  <a:lnTo>
-                    <a:pt x="1718940" y="764770"/>
-                  </a:lnTo>
-                  <a:lnTo>
-                    <a:pt x="1790563" y="790708"/>
-                  </a:lnTo>
-                  <a:lnTo>
-                    <a:pt x="1862185" y="816235"/>
-                  </a:lnTo>
-                  <a:lnTo>
-                    <a:pt x="1933808" y="841358"/>
-                  </a:lnTo>
-                  <a:lnTo>
-                    <a:pt x="2005430" y="866082"/>
-                  </a:lnTo>
-                  <a:lnTo>
-                    <a:pt x="2077053" y="890415"/>
-                  </a:lnTo>
-                  <a:lnTo>
-                    <a:pt x="2148675" y="914362"/>
-                  </a:lnTo>
-                  <a:lnTo>
-                    <a:pt x="2220298" y="937929"/>
-                  </a:lnTo>
-                  <a:lnTo>
-                    <a:pt x="2291920" y="961123"/>
-                  </a:lnTo>
-                  <a:lnTo>
-                    <a:pt x="2363543" y="983949"/>
-                  </a:lnTo>
-                  <a:lnTo>
-                    <a:pt x="2435165" y="1006414"/>
-                  </a:lnTo>
-                  <a:lnTo>
-                    <a:pt x="2506788" y="1028522"/>
-                  </a:lnTo>
-                  <a:lnTo>
-                    <a:pt x="2578410" y="1050280"/>
-                  </a:lnTo>
-                  <a:lnTo>
-                    <a:pt x="2650033" y="1071693"/>
-                  </a:lnTo>
-                  <a:lnTo>
-                    <a:pt x="2721655" y="1092767"/>
-                  </a:lnTo>
-                  <a:lnTo>
-                    <a:pt x="2793278" y="1113507"/>
-                  </a:lnTo>
-                  <a:lnTo>
-                    <a:pt x="2864901" y="1133918"/>
-                  </a:lnTo>
-                  <a:lnTo>
-                    <a:pt x="2936523" y="1154006"/>
-                  </a:lnTo>
-                  <a:lnTo>
-                    <a:pt x="3008146" y="1173775"/>
-                  </a:lnTo>
-                  <a:lnTo>
-                    <a:pt x="3079768" y="1193231"/>
-                  </a:lnTo>
-                  <a:lnTo>
-                    <a:pt x="3151391" y="1212378"/>
-                  </a:lnTo>
-                  <a:lnTo>
-                    <a:pt x="3223013" y="1231223"/>
-                  </a:lnTo>
-                  <a:lnTo>
-                    <a:pt x="3294636" y="1249768"/>
-                  </a:lnTo>
-                  <a:lnTo>
-                    <a:pt x="3366258" y="1268020"/>
-                  </a:lnTo>
-                  <a:lnTo>
-                    <a:pt x="3437881" y="1285982"/>
-                  </a:lnTo>
-                  <a:lnTo>
-                    <a:pt x="3509503" y="1303659"/>
-                  </a:lnTo>
-                  <a:lnTo>
-                    <a:pt x="3581126" y="1321057"/>
-                  </a:lnTo>
-                  <a:lnTo>
-                    <a:pt x="3652748" y="1338179"/>
-                  </a:lnTo>
-                  <a:lnTo>
-                    <a:pt x="3724371" y="1355029"/>
-                  </a:lnTo>
-                  <a:lnTo>
-                    <a:pt x="3795993" y="1371612"/>
-                  </a:lnTo>
-                  <a:lnTo>
-                    <a:pt x="3867616" y="1387933"/>
-                  </a:lnTo>
-                  <a:lnTo>
-                    <a:pt x="3939238" y="1403994"/>
-                  </a:lnTo>
-                  <a:lnTo>
-                    <a:pt x="4010861" y="1419802"/>
-                  </a:lnTo>
-                  <a:lnTo>
-                    <a:pt x="4082483" y="1435358"/>
-                  </a:lnTo>
-                  <a:lnTo>
-                    <a:pt x="4154106" y="1450668"/>
-                  </a:lnTo>
-                  <a:lnTo>
-                    <a:pt x="4225729" y="1465736"/>
-                  </a:lnTo>
-                  <a:lnTo>
-                    <a:pt x="4297351" y="1480565"/>
-                  </a:lnTo>
-                  <a:lnTo>
-                    <a:pt x="4368974" y="1495158"/>
-                  </a:lnTo>
-                  <a:lnTo>
-                    <a:pt x="4440596" y="1509521"/>
-                  </a:lnTo>
-                  <a:lnTo>
-                    <a:pt x="4512219" y="1523655"/>
-                  </a:lnTo>
-                  <a:lnTo>
-                    <a:pt x="4583841" y="1537566"/>
-                  </a:lnTo>
-                  <a:lnTo>
-                    <a:pt x="4655464" y="1551256"/>
-                  </a:lnTo>
-                  <a:lnTo>
-                    <a:pt x="4727086" y="1564730"/>
-                  </a:lnTo>
-                  <a:lnTo>
-                    <a:pt x="4798709" y="1574147"/>
-                  </a:lnTo>
-                  <a:lnTo>
-                    <a:pt x="4870331" y="1578992"/>
-                  </a:lnTo>
-                  <a:lnTo>
-                    <a:pt x="4941954" y="1583809"/>
-                  </a:lnTo>
-                  <a:lnTo>
-                    <a:pt x="5013576" y="1588598"/>
-                  </a:lnTo>
-                  <a:lnTo>
-                    <a:pt x="5085199" y="1593359"/>
-                  </a:lnTo>
-                  <a:lnTo>
-                    <a:pt x="5156821" y="1598092"/>
-                  </a:lnTo>
-                  <a:lnTo>
-                    <a:pt x="5228444" y="1602797"/>
-                  </a:lnTo>
-                  <a:lnTo>
-                    <a:pt x="5300066" y="1607475"/>
-                  </a:lnTo>
-                  <a:lnTo>
-                    <a:pt x="5371689" y="1612125"/>
-                  </a:lnTo>
-                  <a:lnTo>
-                    <a:pt x="5443311" y="1616748"/>
-                  </a:lnTo>
-                  <a:lnTo>
-                    <a:pt x="5514934" y="1621344"/>
-                  </a:lnTo>
-                  <a:lnTo>
-                    <a:pt x="5586557" y="1625913"/>
-                  </a:lnTo>
-                  <a:lnTo>
-                    <a:pt x="5658179" y="1630455"/>
-                  </a:lnTo>
-                  <a:lnTo>
-                    <a:pt x="5729802" y="1634971"/>
-                  </a:lnTo>
-                  <a:lnTo>
-                    <a:pt x="5801424" y="1639460"/>
-                  </a:lnTo>
-                  <a:lnTo>
-                    <a:pt x="5873047" y="1643923"/>
-                  </a:lnTo>
-                  <a:lnTo>
-                    <a:pt x="5944669" y="1648360"/>
-                  </a:lnTo>
-                  <a:lnTo>
-                    <a:pt x="6016292" y="1652771"/>
-                  </a:lnTo>
-                  <a:lnTo>
-                    <a:pt x="6087914" y="1657156"/>
-                  </a:lnTo>
-                  <a:lnTo>
-                    <a:pt x="6159537" y="1661515"/>
-                  </a:lnTo>
-                  <a:lnTo>
-                    <a:pt x="6231159" y="1665849"/>
-                  </a:lnTo>
-                  <a:lnTo>
-                    <a:pt x="6302782" y="1670157"/>
-                  </a:lnTo>
-                  <a:lnTo>
-                    <a:pt x="6374404" y="1674440"/>
-                  </a:lnTo>
-                  <a:lnTo>
-                    <a:pt x="6446027" y="1678698"/>
-                  </a:lnTo>
-                  <a:lnTo>
-                    <a:pt x="6517649" y="1682931"/>
-                  </a:lnTo>
-                  <a:lnTo>
-                    <a:pt x="6589272" y="1687139"/>
-                  </a:lnTo>
-                  <a:lnTo>
-                    <a:pt x="6660894" y="1691323"/>
-                  </a:lnTo>
-                  <a:lnTo>
-                    <a:pt x="6732517" y="1695482"/>
-                  </a:lnTo>
-                  <a:lnTo>
-                    <a:pt x="6804139" y="1699617"/>
-                  </a:lnTo>
-                  <a:lnTo>
-                    <a:pt x="6875762" y="1703728"/>
-                  </a:lnTo>
-                  <a:lnTo>
-                    <a:pt x="6947385" y="1707814"/>
-                  </a:lnTo>
-                  <a:lnTo>
-                    <a:pt x="7019007" y="1711877"/>
-                  </a:lnTo>
-                  <a:lnTo>
-                    <a:pt x="7090630" y="1715915"/>
+                    <a:pt x="71622" y="38295"/>
+                  </a:lnTo>
+                  <a:lnTo>
+                    <a:pt x="143245" y="75982"/>
+                  </a:lnTo>
+                  <a:lnTo>
+                    <a:pt x="214867" y="113069"/>
+                  </a:lnTo>
+                  <a:lnTo>
+                    <a:pt x="286490" y="149567"/>
+                  </a:lnTo>
+                  <a:lnTo>
+                    <a:pt x="358112" y="185485"/>
+                  </a:lnTo>
+                  <a:lnTo>
+                    <a:pt x="429735" y="220832"/>
+                  </a:lnTo>
+                  <a:lnTo>
+                    <a:pt x="501357" y="255617"/>
+                  </a:lnTo>
+                  <a:lnTo>
+                    <a:pt x="572980" y="289849"/>
+                  </a:lnTo>
+                  <a:lnTo>
+                    <a:pt x="644602" y="323537"/>
+                  </a:lnTo>
+                  <a:lnTo>
+                    <a:pt x="716225" y="356690"/>
+                  </a:lnTo>
+                  <a:lnTo>
+                    <a:pt x="787847" y="389315"/>
+                  </a:lnTo>
+                  <a:lnTo>
+                    <a:pt x="859470" y="421422"/>
+                  </a:lnTo>
+                  <a:lnTo>
+                    <a:pt x="931092" y="453018"/>
+                  </a:lnTo>
+                  <a:lnTo>
+                    <a:pt x="1002715" y="484113"/>
+                  </a:lnTo>
+                  <a:lnTo>
+                    <a:pt x="1074337" y="514712"/>
+                  </a:lnTo>
+                  <a:lnTo>
+                    <a:pt x="1145960" y="544826"/>
+                  </a:lnTo>
+                  <a:lnTo>
+                    <a:pt x="1217582" y="574461"/>
+                  </a:lnTo>
+                  <a:lnTo>
+                    <a:pt x="1289205" y="603624"/>
+                  </a:lnTo>
+                  <a:lnTo>
+                    <a:pt x="1360827" y="632324"/>
+                  </a:lnTo>
+                  <a:lnTo>
+                    <a:pt x="1432450" y="660568"/>
+                  </a:lnTo>
+                  <a:lnTo>
+                    <a:pt x="1504073" y="688363"/>
+                  </a:lnTo>
+                  <a:lnTo>
+                    <a:pt x="1575695" y="715716"/>
+                  </a:lnTo>
+                  <a:lnTo>
+                    <a:pt x="1647318" y="742634"/>
+                  </a:lnTo>
+                  <a:lnTo>
+                    <a:pt x="1718940" y="769125"/>
+                  </a:lnTo>
+                  <a:lnTo>
+                    <a:pt x="1790563" y="795194"/>
+                  </a:lnTo>
+                  <a:lnTo>
+                    <a:pt x="1862185" y="820849"/>
+                  </a:lnTo>
+                  <a:lnTo>
+                    <a:pt x="1933808" y="846096"/>
+                  </a:lnTo>
+                  <a:lnTo>
+                    <a:pt x="2005430" y="870942"/>
+                  </a:lnTo>
+                  <a:lnTo>
+                    <a:pt x="2077053" y="895392"/>
+                  </a:lnTo>
+                  <a:lnTo>
+                    <a:pt x="2148675" y="919454"/>
+                  </a:lnTo>
+                  <a:lnTo>
+                    <a:pt x="2220298" y="943134"/>
+                  </a:lnTo>
+                  <a:lnTo>
+                    <a:pt x="2291920" y="966437"/>
+                  </a:lnTo>
+                  <a:lnTo>
+                    <a:pt x="2363543" y="989370"/>
+                  </a:lnTo>
+                  <a:lnTo>
+                    <a:pt x="2435165" y="1011938"/>
+                  </a:lnTo>
+                  <a:lnTo>
+                    <a:pt x="2506788" y="1034147"/>
+                  </a:lnTo>
+                  <a:lnTo>
+                    <a:pt x="2578410" y="1056004"/>
+                  </a:lnTo>
+                  <a:lnTo>
+                    <a:pt x="2650033" y="1077513"/>
+                  </a:lnTo>
+                  <a:lnTo>
+                    <a:pt x="2721655" y="1098680"/>
+                  </a:lnTo>
+                  <a:lnTo>
+                    <a:pt x="2793278" y="1119510"/>
+                  </a:lnTo>
+                  <a:lnTo>
+                    <a:pt x="2864901" y="1140009"/>
+                  </a:lnTo>
+                  <a:lnTo>
+                    <a:pt x="2936523" y="1160183"/>
+                  </a:lnTo>
+                  <a:lnTo>
+                    <a:pt x="3008146" y="1180036"/>
+                  </a:lnTo>
+                  <a:lnTo>
+                    <a:pt x="3079768" y="1199573"/>
+                  </a:lnTo>
+                  <a:lnTo>
+                    <a:pt x="3151391" y="1218800"/>
+                  </a:lnTo>
+                  <a:lnTo>
+                    <a:pt x="3223013" y="1237721"/>
+                  </a:lnTo>
+                  <a:lnTo>
+                    <a:pt x="3294636" y="1256341"/>
+                  </a:lnTo>
+                  <a:lnTo>
+                    <a:pt x="3366258" y="1274666"/>
+                  </a:lnTo>
+                  <a:lnTo>
+                    <a:pt x="3437881" y="1292699"/>
+                  </a:lnTo>
+                  <a:lnTo>
+                    <a:pt x="3509503" y="1310445"/>
+                  </a:lnTo>
+                  <a:lnTo>
+                    <a:pt x="3581126" y="1327909"/>
+                  </a:lnTo>
+                  <a:lnTo>
+                    <a:pt x="3652748" y="1345096"/>
+                  </a:lnTo>
+                  <a:lnTo>
+                    <a:pt x="3724371" y="1362009"/>
+                  </a:lnTo>
+                  <a:lnTo>
+                    <a:pt x="3795993" y="1378654"/>
+                  </a:lnTo>
+                  <a:lnTo>
+                    <a:pt x="3867616" y="1395034"/>
+                  </a:lnTo>
+                  <a:lnTo>
+                    <a:pt x="3939238" y="1411153"/>
+                  </a:lnTo>
+                  <a:lnTo>
+                    <a:pt x="4010861" y="1427017"/>
+                  </a:lnTo>
+                  <a:lnTo>
+                    <a:pt x="4082483" y="1442628"/>
+                  </a:lnTo>
+                  <a:lnTo>
+                    <a:pt x="4154106" y="1457991"/>
+                  </a:lnTo>
+                  <a:lnTo>
+                    <a:pt x="4225729" y="1473110"/>
+                  </a:lnTo>
+                  <a:lnTo>
+                    <a:pt x="4297351" y="1487988"/>
+                  </a:lnTo>
+                  <a:lnTo>
+                    <a:pt x="4368974" y="1502630"/>
+                  </a:lnTo>
+                  <a:lnTo>
+                    <a:pt x="4440596" y="1517039"/>
+                  </a:lnTo>
+                  <a:lnTo>
+                    <a:pt x="4512219" y="1531220"/>
+                  </a:lnTo>
+                  <a:lnTo>
+                    <a:pt x="4583841" y="1545174"/>
+                  </a:lnTo>
+                  <a:lnTo>
+                    <a:pt x="4655464" y="1558907"/>
+                  </a:lnTo>
+                  <a:lnTo>
+                    <a:pt x="4727086" y="1572422"/>
+                  </a:lnTo>
+                  <a:lnTo>
+                    <a:pt x="4798709" y="1581880"/>
+                  </a:lnTo>
+                  <a:lnTo>
+                    <a:pt x="4870331" y="1586769"/>
+                  </a:lnTo>
+                  <a:lnTo>
+                    <a:pt x="4941954" y="1591628"/>
+                  </a:lnTo>
+                  <a:lnTo>
+                    <a:pt x="5013576" y="1596459"/>
+                  </a:lnTo>
+                  <a:lnTo>
+                    <a:pt x="5085199" y="1601261"/>
+                  </a:lnTo>
+                  <a:lnTo>
+                    <a:pt x="5156821" y="1606034"/>
+                  </a:lnTo>
+                  <a:lnTo>
+                    <a:pt x="5228444" y="1610780"/>
+                  </a:lnTo>
+                  <a:lnTo>
+                    <a:pt x="5300066" y="1615497"/>
+                  </a:lnTo>
+                  <a:lnTo>
+                    <a:pt x="5371689" y="1620187"/>
+                  </a:lnTo>
+                  <a:lnTo>
+                    <a:pt x="5443311" y="1624849"/>
+                  </a:lnTo>
+                  <a:lnTo>
+                    <a:pt x="5514934" y="1629483"/>
+                  </a:lnTo>
+                  <a:lnTo>
+                    <a:pt x="5586557" y="1634090"/>
+                  </a:lnTo>
+                  <a:lnTo>
+                    <a:pt x="5658179" y="1638670"/>
+                  </a:lnTo>
+                  <a:lnTo>
+                    <a:pt x="5729802" y="1643223"/>
+                  </a:lnTo>
+                  <a:lnTo>
+                    <a:pt x="5801424" y="1647748"/>
+                  </a:lnTo>
+                  <a:lnTo>
+                    <a:pt x="5873047" y="1652247"/>
+                  </a:lnTo>
+                  <a:lnTo>
+                    <a:pt x="5944669" y="1656720"/>
+                  </a:lnTo>
+                  <a:lnTo>
+                    <a:pt x="6016292" y="1661166"/>
+                  </a:lnTo>
+                  <a:lnTo>
+                    <a:pt x="6087914" y="1665585"/>
+                  </a:lnTo>
+                  <a:lnTo>
+                    <a:pt x="6159537" y="1669979"/>
+                  </a:lnTo>
+                  <a:lnTo>
+                    <a:pt x="6231159" y="1674347"/>
+                  </a:lnTo>
+                  <a:lnTo>
+                    <a:pt x="6302782" y="1678689"/>
+                  </a:lnTo>
+                  <a:lnTo>
+                    <a:pt x="6374404" y="1683005"/>
+                  </a:lnTo>
+                  <a:lnTo>
+                    <a:pt x="6446027" y="1687295"/>
+                  </a:lnTo>
+                  <a:lnTo>
+                    <a:pt x="6517649" y="1691561"/>
+                  </a:lnTo>
+                  <a:lnTo>
+                    <a:pt x="6589272" y="1695801"/>
+                  </a:lnTo>
+                  <a:lnTo>
+                    <a:pt x="6660894" y="1700016"/>
+                  </a:lnTo>
+                  <a:lnTo>
+                    <a:pt x="6732517" y="1704206"/>
+                  </a:lnTo>
+                  <a:lnTo>
+                    <a:pt x="6804139" y="1708371"/>
+                  </a:lnTo>
+                  <a:lnTo>
+                    <a:pt x="6875762" y="1712512"/>
+                  </a:lnTo>
+                  <a:lnTo>
+                    <a:pt x="6947385" y="1716628"/>
+                  </a:lnTo>
+                  <a:lnTo>
+                    <a:pt x="7019007" y="1720720"/>
+                  </a:lnTo>
+                  <a:lnTo>
+                    <a:pt x="7090630" y="1724788"/>
                   </a:lnTo>
                 </a:path>
               </a:pathLst>
@@ -4001,309 +4001,309 @@
           </p:nvSpPr>
           <p:spPr>
             <a:xfrm>
-              <a:off x="1172049" y="4331042"/>
-              <a:ext cx="7090630" cy="732378"/>
+              <a:off x="1172049" y="4326780"/>
+              <a:ext cx="7090630" cy="737412"/>
             </a:xfrm>
             <a:custGeom>
               <a:avLst/>
               <a:pathLst>
-                <a:path w="7090630" h="732378">
+                <a:path w="7090630" h="737412">
                   <a:moveTo>
-                    <a:pt x="7090630" y="732378"/>
+                    <a:pt x="7090630" y="737412"/>
                   </a:moveTo>
                   <a:lnTo>
-                    <a:pt x="7019007" y="724425"/>
-                  </a:lnTo>
-                  <a:lnTo>
-                    <a:pt x="6947385" y="716344"/>
-                  </a:lnTo>
-                  <a:lnTo>
-                    <a:pt x="6875762" y="708133"/>
-                  </a:lnTo>
-                  <a:lnTo>
-                    <a:pt x="6804139" y="699790"/>
-                  </a:lnTo>
-                  <a:lnTo>
-                    <a:pt x="6732517" y="691313"/>
-                  </a:lnTo>
-                  <a:lnTo>
-                    <a:pt x="6660894" y="682699"/>
-                  </a:lnTo>
-                  <a:lnTo>
-                    <a:pt x="6589272" y="673946"/>
-                  </a:lnTo>
-                  <a:lnTo>
-                    <a:pt x="6517649" y="665053"/>
-                  </a:lnTo>
-                  <a:lnTo>
-                    <a:pt x="6446027" y="656016"/>
-                  </a:lnTo>
-                  <a:lnTo>
-                    <a:pt x="6374404" y="646833"/>
-                  </a:lnTo>
-                  <a:lnTo>
-                    <a:pt x="6302782" y="637503"/>
-                  </a:lnTo>
-                  <a:lnTo>
-                    <a:pt x="6231159" y="628022"/>
-                  </a:lnTo>
-                  <a:lnTo>
-                    <a:pt x="6159537" y="618389"/>
-                  </a:lnTo>
-                  <a:lnTo>
-                    <a:pt x="6087914" y="608601"/>
-                  </a:lnTo>
-                  <a:lnTo>
-                    <a:pt x="6016292" y="598655"/>
-                  </a:lnTo>
-                  <a:lnTo>
-                    <a:pt x="5944669" y="588549"/>
-                  </a:lnTo>
-                  <a:lnTo>
-                    <a:pt x="5873047" y="578280"/>
-                  </a:lnTo>
-                  <a:lnTo>
-                    <a:pt x="5801424" y="567846"/>
-                  </a:lnTo>
-                  <a:lnTo>
-                    <a:pt x="5729802" y="557243"/>
-                  </a:lnTo>
-                  <a:lnTo>
-                    <a:pt x="5658179" y="546470"/>
-                  </a:lnTo>
-                  <a:lnTo>
-                    <a:pt x="5586557" y="535524"/>
-                  </a:lnTo>
-                  <a:lnTo>
-                    <a:pt x="5514934" y="524401"/>
-                  </a:lnTo>
-                  <a:lnTo>
-                    <a:pt x="5443311" y="513099"/>
-                  </a:lnTo>
-                  <a:lnTo>
-                    <a:pt x="5371689" y="501615"/>
-                  </a:lnTo>
-                  <a:lnTo>
-                    <a:pt x="5300066" y="489946"/>
-                  </a:lnTo>
-                  <a:lnTo>
-                    <a:pt x="5228444" y="478089"/>
-                  </a:lnTo>
-                  <a:lnTo>
-                    <a:pt x="5156821" y="466041"/>
-                  </a:lnTo>
-                  <a:lnTo>
-                    <a:pt x="5085199" y="453800"/>
-                  </a:lnTo>
-                  <a:lnTo>
-                    <a:pt x="5013576" y="441361"/>
-                  </a:lnTo>
-                  <a:lnTo>
-                    <a:pt x="4941954" y="428722"/>
-                  </a:lnTo>
-                  <a:lnTo>
-                    <a:pt x="4870331" y="415879"/>
-                  </a:lnTo>
-                  <a:lnTo>
-                    <a:pt x="4798709" y="402829"/>
-                  </a:lnTo>
-                  <a:lnTo>
-                    <a:pt x="4727086" y="394112"/>
-                  </a:lnTo>
-                  <a:lnTo>
-                    <a:pt x="4655464" y="389210"/>
-                  </a:lnTo>
-                  <a:lnTo>
-                    <a:pt x="4583841" y="384278"/>
-                  </a:lnTo>
-                  <a:lnTo>
-                    <a:pt x="4512219" y="379317"/>
-                  </a:lnTo>
-                  <a:lnTo>
-                    <a:pt x="4440596" y="374327"/>
-                  </a:lnTo>
-                  <a:lnTo>
-                    <a:pt x="4368974" y="369308"/>
-                  </a:lnTo>
-                  <a:lnTo>
-                    <a:pt x="4297351" y="364259"/>
-                  </a:lnTo>
-                  <a:lnTo>
-                    <a:pt x="4225729" y="359180"/>
-                  </a:lnTo>
-                  <a:lnTo>
-                    <a:pt x="4154106" y="354072"/>
-                  </a:lnTo>
-                  <a:lnTo>
-                    <a:pt x="4082483" y="348933"/>
-                  </a:lnTo>
-                  <a:lnTo>
-                    <a:pt x="4010861" y="343764"/>
-                  </a:lnTo>
-                  <a:lnTo>
-                    <a:pt x="3939238" y="338565"/>
-                  </a:lnTo>
-                  <a:lnTo>
-                    <a:pt x="3867616" y="333335"/>
-                  </a:lnTo>
-                  <a:lnTo>
-                    <a:pt x="3795993" y="328074"/>
-                  </a:lnTo>
-                  <a:lnTo>
-                    <a:pt x="3724371" y="322782"/>
-                  </a:lnTo>
-                  <a:lnTo>
-                    <a:pt x="3652748" y="317459"/>
-                  </a:lnTo>
-                  <a:lnTo>
-                    <a:pt x="3581126" y="312105"/>
-                  </a:lnTo>
-                  <a:lnTo>
-                    <a:pt x="3509503" y="306719"/>
-                  </a:lnTo>
-                  <a:lnTo>
-                    <a:pt x="3437881" y="301301"/>
-                  </a:lnTo>
-                  <a:lnTo>
-                    <a:pt x="3366258" y="295851"/>
-                  </a:lnTo>
-                  <a:lnTo>
-                    <a:pt x="3294636" y="290370"/>
-                  </a:lnTo>
-                  <a:lnTo>
-                    <a:pt x="3223013" y="284856"/>
-                  </a:lnTo>
-                  <a:lnTo>
-                    <a:pt x="3151391" y="279309"/>
-                  </a:lnTo>
-                  <a:lnTo>
-                    <a:pt x="3079768" y="273730"/>
-                  </a:lnTo>
-                  <a:lnTo>
-                    <a:pt x="3008146" y="268118"/>
-                  </a:lnTo>
-                  <a:lnTo>
-                    <a:pt x="2936523" y="262473"/>
-                  </a:lnTo>
-                  <a:lnTo>
-                    <a:pt x="2864901" y="256794"/>
-                  </a:lnTo>
-                  <a:lnTo>
-                    <a:pt x="2793278" y="251083"/>
-                  </a:lnTo>
-                  <a:lnTo>
-                    <a:pt x="2721655" y="245337"/>
-                  </a:lnTo>
-                  <a:lnTo>
-                    <a:pt x="2650033" y="239558"/>
-                  </a:lnTo>
-                  <a:lnTo>
-                    <a:pt x="2578410" y="233744"/>
-                  </a:lnTo>
-                  <a:lnTo>
-                    <a:pt x="2506788" y="227897"/>
-                  </a:lnTo>
-                  <a:lnTo>
-                    <a:pt x="2435165" y="222014"/>
-                  </a:lnTo>
-                  <a:lnTo>
-                    <a:pt x="2363543" y="216098"/>
-                  </a:lnTo>
-                  <a:lnTo>
-                    <a:pt x="2291920" y="210146"/>
-                  </a:lnTo>
-                  <a:lnTo>
-                    <a:pt x="2220298" y="204159"/>
-                  </a:lnTo>
-                  <a:lnTo>
-                    <a:pt x="2148675" y="198137"/>
-                  </a:lnTo>
-                  <a:lnTo>
-                    <a:pt x="2077053" y="192080"/>
-                  </a:lnTo>
-                  <a:lnTo>
-                    <a:pt x="2005430" y="185987"/>
-                  </a:lnTo>
-                  <a:lnTo>
-                    <a:pt x="1933808" y="179858"/>
-                  </a:lnTo>
-                  <a:lnTo>
-                    <a:pt x="1862185" y="173693"/>
-                  </a:lnTo>
-                  <a:lnTo>
-                    <a:pt x="1790563" y="167491"/>
-                  </a:lnTo>
-                  <a:lnTo>
-                    <a:pt x="1718940" y="161253"/>
-                  </a:lnTo>
-                  <a:lnTo>
-                    <a:pt x="1647318" y="154978"/>
-                  </a:lnTo>
-                  <a:lnTo>
-                    <a:pt x="1575695" y="148667"/>
-                  </a:lnTo>
-                  <a:lnTo>
-                    <a:pt x="1504073" y="142318"/>
-                  </a:lnTo>
-                  <a:lnTo>
-                    <a:pt x="1432450" y="135931"/>
-                  </a:lnTo>
-                  <a:lnTo>
-                    <a:pt x="1360827" y="129507"/>
-                  </a:lnTo>
-                  <a:lnTo>
-                    <a:pt x="1289205" y="123046"/>
-                  </a:lnTo>
-                  <a:lnTo>
-                    <a:pt x="1217582" y="116546"/>
-                  </a:lnTo>
-                  <a:lnTo>
-                    <a:pt x="1145960" y="110007"/>
-                  </a:lnTo>
-                  <a:lnTo>
-                    <a:pt x="1074337" y="103431"/>
-                  </a:lnTo>
-                  <a:lnTo>
-                    <a:pt x="1002715" y="96815"/>
-                  </a:lnTo>
-                  <a:lnTo>
-                    <a:pt x="931092" y="90161"/>
-                  </a:lnTo>
-                  <a:lnTo>
-                    <a:pt x="859470" y="83467"/>
-                  </a:lnTo>
-                  <a:lnTo>
-                    <a:pt x="787847" y="76734"/>
-                  </a:lnTo>
-                  <a:lnTo>
-                    <a:pt x="716225" y="69961"/>
-                  </a:lnTo>
-                  <a:lnTo>
-                    <a:pt x="644602" y="63149"/>
-                  </a:lnTo>
-                  <a:lnTo>
-                    <a:pt x="572980" y="56296"/>
-                  </a:lnTo>
-                  <a:lnTo>
-                    <a:pt x="501357" y="49403"/>
-                  </a:lnTo>
-                  <a:lnTo>
-                    <a:pt x="429735" y="42469"/>
-                  </a:lnTo>
-                  <a:lnTo>
-                    <a:pt x="358112" y="35494"/>
-                  </a:lnTo>
-                  <a:lnTo>
-                    <a:pt x="286490" y="28478"/>
-                  </a:lnTo>
-                  <a:lnTo>
-                    <a:pt x="214867" y="21421"/>
-                  </a:lnTo>
-                  <a:lnTo>
-                    <a:pt x="143245" y="14323"/>
-                  </a:lnTo>
-                  <a:lnTo>
-                    <a:pt x="71622" y="7182"/>
+                    <a:pt x="7019007" y="729447"/>
+                  </a:lnTo>
+                  <a:lnTo>
+                    <a:pt x="6947385" y="721354"/>
+                  </a:lnTo>
+                  <a:lnTo>
+                    <a:pt x="6875762" y="713130"/>
+                  </a:lnTo>
+                  <a:lnTo>
+                    <a:pt x="6804139" y="704774"/>
+                  </a:lnTo>
+                  <a:lnTo>
+                    <a:pt x="6732517" y="696282"/>
+                  </a:lnTo>
+                  <a:lnTo>
+                    <a:pt x="6660894" y="687653"/>
+                  </a:lnTo>
+                  <a:lnTo>
+                    <a:pt x="6589272" y="678885"/>
+                  </a:lnTo>
+                  <a:lnTo>
+                    <a:pt x="6517649" y="669976"/>
+                  </a:lnTo>
+                  <a:lnTo>
+                    <a:pt x="6446027" y="660922"/>
+                  </a:lnTo>
+                  <a:lnTo>
+                    <a:pt x="6374404" y="651722"/>
+                  </a:lnTo>
+                  <a:lnTo>
+                    <a:pt x="6302782" y="642373"/>
+                  </a:lnTo>
+                  <a:lnTo>
+                    <a:pt x="6231159" y="632874"/>
+                  </a:lnTo>
+                  <a:lnTo>
+                    <a:pt x="6159537" y="623221"/>
+                  </a:lnTo>
+                  <a:lnTo>
+                    <a:pt x="6087914" y="613412"/>
+                  </a:lnTo>
+                  <a:lnTo>
+                    <a:pt x="6016292" y="603445"/>
+                  </a:lnTo>
+                  <a:lnTo>
+                    <a:pt x="5944669" y="593316"/>
+                  </a:lnTo>
+                  <a:lnTo>
+                    <a:pt x="5873047" y="583024"/>
+                  </a:lnTo>
+                  <a:lnTo>
+                    <a:pt x="5801424" y="572566"/>
+                  </a:lnTo>
+                  <a:lnTo>
+                    <a:pt x="5729802" y="561939"/>
+                  </a:lnTo>
+                  <a:lnTo>
+                    <a:pt x="5658179" y="551140"/>
+                  </a:lnTo>
+                  <a:lnTo>
+                    <a:pt x="5586557" y="540167"/>
+                  </a:lnTo>
+                  <a:lnTo>
+                    <a:pt x="5514934" y="529016"/>
+                  </a:lnTo>
+                  <a:lnTo>
+                    <a:pt x="5443311" y="517686"/>
+                  </a:lnTo>
+                  <a:lnTo>
+                    <a:pt x="5371689" y="506172"/>
+                  </a:lnTo>
+                  <a:lnTo>
+                    <a:pt x="5300066" y="494473"/>
+                  </a:lnTo>
+                  <a:lnTo>
+                    <a:pt x="5228444" y="482584"/>
+                  </a:lnTo>
+                  <a:lnTo>
+                    <a:pt x="5156821" y="470503"/>
+                  </a:lnTo>
+                  <a:lnTo>
+                    <a:pt x="5085199" y="458228"/>
+                  </a:lnTo>
+                  <a:lnTo>
+                    <a:pt x="5013576" y="445753"/>
+                  </a:lnTo>
+                  <a:lnTo>
+                    <a:pt x="4941954" y="433078"/>
+                  </a:lnTo>
+                  <a:lnTo>
+                    <a:pt x="4870331" y="420198"/>
+                  </a:lnTo>
+                  <a:lnTo>
+                    <a:pt x="4798709" y="407109"/>
+                  </a:lnTo>
+                  <a:lnTo>
+                    <a:pt x="4727086" y="398351"/>
+                  </a:lnTo>
+                  <a:lnTo>
+                    <a:pt x="4655464" y="393404"/>
+                  </a:lnTo>
+                  <a:lnTo>
+                    <a:pt x="4583841" y="388428"/>
+                  </a:lnTo>
+                  <a:lnTo>
+                    <a:pt x="4512219" y="383423"/>
+                  </a:lnTo>
+                  <a:lnTo>
+                    <a:pt x="4440596" y="378387"/>
+                  </a:lnTo>
+                  <a:lnTo>
+                    <a:pt x="4368974" y="373322"/>
+                  </a:lnTo>
+                  <a:lnTo>
+                    <a:pt x="4297351" y="368227"/>
+                  </a:lnTo>
+                  <a:lnTo>
+                    <a:pt x="4225729" y="363101"/>
+                  </a:lnTo>
+                  <a:lnTo>
+                    <a:pt x="4154106" y="357945"/>
+                  </a:lnTo>
+                  <a:lnTo>
+                    <a:pt x="4082483" y="352758"/>
+                  </a:lnTo>
+                  <a:lnTo>
+                    <a:pt x="4010861" y="347541"/>
+                  </a:lnTo>
+                  <a:lnTo>
+                    <a:pt x="3939238" y="342292"/>
+                  </a:lnTo>
+                  <a:lnTo>
+                    <a:pt x="3867616" y="337013"/>
+                  </a:lnTo>
+                  <a:lnTo>
+                    <a:pt x="3795993" y="331701"/>
+                  </a:lnTo>
+                  <a:lnTo>
+                    <a:pt x="3724371" y="326359"/>
+                  </a:lnTo>
+                  <a:lnTo>
+                    <a:pt x="3652748" y="320984"/>
+                  </a:lnTo>
+                  <a:lnTo>
+                    <a:pt x="3581126" y="315578"/>
+                  </a:lnTo>
+                  <a:lnTo>
+                    <a:pt x="3509503" y="310139"/>
+                  </a:lnTo>
+                  <a:lnTo>
+                    <a:pt x="3437881" y="304668"/>
+                  </a:lnTo>
+                  <a:lnTo>
+                    <a:pt x="3366258" y="299165"/>
+                  </a:lnTo>
+                  <a:lnTo>
+                    <a:pt x="3294636" y="293629"/>
+                  </a:lnTo>
+                  <a:lnTo>
+                    <a:pt x="3223013" y="288060"/>
+                  </a:lnTo>
+                  <a:lnTo>
+                    <a:pt x="3151391" y="282457"/>
+                  </a:lnTo>
+                  <a:lnTo>
+                    <a:pt x="3079768" y="276822"/>
+                  </a:lnTo>
+                  <a:lnTo>
+                    <a:pt x="3008146" y="271153"/>
+                  </a:lnTo>
+                  <a:lnTo>
+                    <a:pt x="2936523" y="265450"/>
+                  </a:lnTo>
+                  <a:lnTo>
+                    <a:pt x="2864901" y="259714"/>
+                  </a:lnTo>
+                  <a:lnTo>
+                    <a:pt x="2793278" y="253943"/>
+                  </a:lnTo>
+                  <a:lnTo>
+                    <a:pt x="2721655" y="248138"/>
+                  </a:lnTo>
+                  <a:lnTo>
+                    <a:pt x="2650033" y="242299"/>
+                  </a:lnTo>
+                  <a:lnTo>
+                    <a:pt x="2578410" y="236424"/>
+                  </a:lnTo>
+                  <a:lnTo>
+                    <a:pt x="2506788" y="230515"/>
+                  </a:lnTo>
+                  <a:lnTo>
+                    <a:pt x="2435165" y="224571"/>
+                  </a:lnTo>
+                  <a:lnTo>
+                    <a:pt x="2363543" y="218591"/>
+                  </a:lnTo>
+                  <a:lnTo>
+                    <a:pt x="2291920" y="212576"/>
+                  </a:lnTo>
+                  <a:lnTo>
+                    <a:pt x="2220298" y="206525"/>
+                  </a:lnTo>
+                  <a:lnTo>
+                    <a:pt x="2148675" y="200439"/>
+                  </a:lnTo>
+                  <a:lnTo>
+                    <a:pt x="2077053" y="194316"/>
+                  </a:lnTo>
+                  <a:lnTo>
+                    <a:pt x="2005430" y="188156"/>
+                  </a:lnTo>
+                  <a:lnTo>
+                    <a:pt x="1933808" y="181960"/>
+                  </a:lnTo>
+                  <a:lnTo>
+                    <a:pt x="1862185" y="175727"/>
+                  </a:lnTo>
+                  <a:lnTo>
+                    <a:pt x="1790563" y="169457"/>
+                  </a:lnTo>
+                  <a:lnTo>
+                    <a:pt x="1718940" y="163150"/>
+                  </a:lnTo>
+                  <a:lnTo>
+                    <a:pt x="1647318" y="156805"/>
+                  </a:lnTo>
+                  <a:lnTo>
+                    <a:pt x="1575695" y="150423"/>
+                  </a:lnTo>
+                  <a:lnTo>
+                    <a:pt x="1504073" y="144003"/>
+                  </a:lnTo>
+                  <a:lnTo>
+                    <a:pt x="1432450" y="137544"/>
+                  </a:lnTo>
+                  <a:lnTo>
+                    <a:pt x="1360827" y="131047"/>
+                  </a:lnTo>
+                  <a:lnTo>
+                    <a:pt x="1289205" y="124512"/>
+                  </a:lnTo>
+                  <a:lnTo>
+                    <a:pt x="1217582" y="117937"/>
+                  </a:lnTo>
+                  <a:lnTo>
+                    <a:pt x="1145960" y="111324"/>
+                  </a:lnTo>
+                  <a:lnTo>
+                    <a:pt x="1074337" y="104671"/>
+                  </a:lnTo>
+                  <a:lnTo>
+                    <a:pt x="1002715" y="97979"/>
+                  </a:lnTo>
+                  <a:lnTo>
+                    <a:pt x="931092" y="91247"/>
+                  </a:lnTo>
+                  <a:lnTo>
+                    <a:pt x="859470" y="84475"/>
+                  </a:lnTo>
+                  <a:lnTo>
+                    <a:pt x="787847" y="77662"/>
+                  </a:lnTo>
+                  <a:lnTo>
+                    <a:pt x="716225" y="70809"/>
+                  </a:lnTo>
+                  <a:lnTo>
+                    <a:pt x="644602" y="63916"/>
+                  </a:lnTo>
+                  <a:lnTo>
+                    <a:pt x="572980" y="56981"/>
+                  </a:lnTo>
+                  <a:lnTo>
+                    <a:pt x="501357" y="50005"/>
+                  </a:lnTo>
+                  <a:lnTo>
+                    <a:pt x="429735" y="42988"/>
+                  </a:lnTo>
+                  <a:lnTo>
+                    <a:pt x="358112" y="35929"/>
+                  </a:lnTo>
+                  <a:lnTo>
+                    <a:pt x="286490" y="28828"/>
+                  </a:lnTo>
+                  <a:lnTo>
+                    <a:pt x="214867" y="21685"/>
+                  </a:lnTo>
+                  <a:lnTo>
+                    <a:pt x="143245" y="14499"/>
+                  </a:lnTo>
+                  <a:lnTo>
+                    <a:pt x="71622" y="7271"/>
                   </a:lnTo>
                   <a:lnTo>
                     <a:pt x="0" y="0"/>
@@ -4326,312 +4326,312 @@
           </p:nvSpPr>
           <p:spPr>
             <a:xfrm>
-              <a:off x="1172049" y="3841273"/>
-              <a:ext cx="7090630" cy="1134172"/>
+              <a:off x="1172049" y="3835535"/>
+              <a:ext cx="7090630" cy="1140856"/>
             </a:xfrm>
             <a:custGeom>
               <a:avLst/>
               <a:pathLst>
-                <a:path w="7090630" h="1134172">
+                <a:path w="7090630" h="1140856">
                   <a:moveTo>
                     <a:pt x="0" y="0"/>
                   </a:moveTo>
                   <a:lnTo>
-                    <a:pt x="71622" y="18645"/>
-                  </a:lnTo>
-                  <a:lnTo>
-                    <a:pt x="143245" y="37088"/>
-                  </a:lnTo>
-                  <a:lnTo>
-                    <a:pt x="214867" y="55330"/>
-                  </a:lnTo>
-                  <a:lnTo>
-                    <a:pt x="286490" y="73375"/>
-                  </a:lnTo>
-                  <a:lnTo>
-                    <a:pt x="358112" y="91223"/>
-                  </a:lnTo>
-                  <a:lnTo>
-                    <a:pt x="429735" y="108877"/>
-                  </a:lnTo>
-                  <a:lnTo>
-                    <a:pt x="501357" y="126340"/>
-                  </a:lnTo>
-                  <a:lnTo>
-                    <a:pt x="572980" y="143612"/>
-                  </a:lnTo>
-                  <a:lnTo>
-                    <a:pt x="644602" y="160697"/>
-                  </a:lnTo>
-                  <a:lnTo>
-                    <a:pt x="716225" y="177597"/>
-                  </a:lnTo>
-                  <a:lnTo>
-                    <a:pt x="787847" y="194312"/>
-                  </a:lnTo>
-                  <a:lnTo>
-                    <a:pt x="859470" y="210847"/>
-                  </a:lnTo>
-                  <a:lnTo>
-                    <a:pt x="931092" y="227201"/>
-                  </a:lnTo>
-                  <a:lnTo>
-                    <a:pt x="1002715" y="243378"/>
-                  </a:lnTo>
-                  <a:lnTo>
-                    <a:pt x="1074337" y="259379"/>
-                  </a:lnTo>
-                  <a:lnTo>
-                    <a:pt x="1145960" y="275206"/>
-                  </a:lnTo>
-                  <a:lnTo>
-                    <a:pt x="1217582" y="290861"/>
-                  </a:lnTo>
-                  <a:lnTo>
-                    <a:pt x="1289205" y="306346"/>
-                  </a:lnTo>
-                  <a:lnTo>
-                    <a:pt x="1360827" y="321663"/>
-                  </a:lnTo>
-                  <a:lnTo>
-                    <a:pt x="1432450" y="336813"/>
-                  </a:lnTo>
-                  <a:lnTo>
-                    <a:pt x="1504073" y="351799"/>
-                  </a:lnTo>
-                  <a:lnTo>
-                    <a:pt x="1575695" y="366622"/>
-                  </a:lnTo>
-                  <a:lnTo>
-                    <a:pt x="1647318" y="381284"/>
-                  </a:lnTo>
-                  <a:lnTo>
-                    <a:pt x="1718940" y="395786"/>
-                  </a:lnTo>
-                  <a:lnTo>
-                    <a:pt x="1790563" y="410131"/>
-                  </a:lnTo>
-                  <a:lnTo>
-                    <a:pt x="1862185" y="424320"/>
-                  </a:lnTo>
-                  <a:lnTo>
-                    <a:pt x="1933808" y="438355"/>
-                  </a:lnTo>
-                  <a:lnTo>
-                    <a:pt x="2005430" y="452238"/>
-                  </a:lnTo>
-                  <a:lnTo>
-                    <a:pt x="2077053" y="465969"/>
-                  </a:lnTo>
-                  <a:lnTo>
-                    <a:pt x="2148675" y="479552"/>
-                  </a:lnTo>
-                  <a:lnTo>
-                    <a:pt x="2220298" y="492986"/>
-                  </a:lnTo>
-                  <a:lnTo>
-                    <a:pt x="2291920" y="506275"/>
-                  </a:lnTo>
-                  <a:lnTo>
-                    <a:pt x="2363543" y="519420"/>
-                  </a:lnTo>
-                  <a:lnTo>
-                    <a:pt x="2435165" y="532421"/>
-                  </a:lnTo>
-                  <a:lnTo>
-                    <a:pt x="2506788" y="545281"/>
-                  </a:lnTo>
-                  <a:lnTo>
-                    <a:pt x="2578410" y="558002"/>
-                  </a:lnTo>
-                  <a:lnTo>
-                    <a:pt x="2650033" y="570584"/>
-                  </a:lnTo>
-                  <a:lnTo>
-                    <a:pt x="2721655" y="583030"/>
-                  </a:lnTo>
-                  <a:lnTo>
-                    <a:pt x="2793278" y="595340"/>
-                  </a:lnTo>
-                  <a:lnTo>
-                    <a:pt x="2864901" y="607517"/>
-                  </a:lnTo>
-                  <a:lnTo>
-                    <a:pt x="2936523" y="619561"/>
-                  </a:lnTo>
-                  <a:lnTo>
-                    <a:pt x="3008146" y="631475"/>
-                  </a:lnTo>
-                  <a:lnTo>
-                    <a:pt x="3079768" y="643259"/>
-                  </a:lnTo>
-                  <a:lnTo>
-                    <a:pt x="3151391" y="654915"/>
-                  </a:lnTo>
-                  <a:lnTo>
-                    <a:pt x="3223013" y="666444"/>
-                  </a:lnTo>
-                  <a:lnTo>
-                    <a:pt x="3294636" y="677848"/>
-                  </a:lnTo>
-                  <a:lnTo>
-                    <a:pt x="3366258" y="689128"/>
-                  </a:lnTo>
-                  <a:lnTo>
-                    <a:pt x="3437881" y="700286"/>
-                  </a:lnTo>
-                  <a:lnTo>
-                    <a:pt x="3509503" y="711322"/>
-                  </a:lnTo>
-                  <a:lnTo>
-                    <a:pt x="3581126" y="722238"/>
-                  </a:lnTo>
-                  <a:lnTo>
-                    <a:pt x="3652748" y="733036"/>
-                  </a:lnTo>
-                  <a:lnTo>
-                    <a:pt x="3724371" y="743717"/>
-                  </a:lnTo>
-                  <a:lnTo>
-                    <a:pt x="3795993" y="754281"/>
-                  </a:lnTo>
-                  <a:lnTo>
-                    <a:pt x="3867616" y="764731"/>
-                  </a:lnTo>
-                  <a:lnTo>
-                    <a:pt x="3939238" y="775067"/>
-                  </a:lnTo>
-                  <a:lnTo>
-                    <a:pt x="4010861" y="785290"/>
-                  </a:lnTo>
-                  <a:lnTo>
-                    <a:pt x="4082483" y="795403"/>
-                  </a:lnTo>
-                  <a:lnTo>
-                    <a:pt x="4154106" y="805406"/>
-                  </a:lnTo>
-                  <a:lnTo>
-                    <a:pt x="4225729" y="815300"/>
-                  </a:lnTo>
-                  <a:lnTo>
-                    <a:pt x="4297351" y="825087"/>
-                  </a:lnTo>
-                  <a:lnTo>
-                    <a:pt x="4368974" y="834767"/>
-                  </a:lnTo>
-                  <a:lnTo>
-                    <a:pt x="4440596" y="844342"/>
-                  </a:lnTo>
-                  <a:lnTo>
-                    <a:pt x="4512219" y="853813"/>
-                  </a:lnTo>
-                  <a:lnTo>
-                    <a:pt x="4583841" y="863181"/>
-                  </a:lnTo>
-                  <a:lnTo>
-                    <a:pt x="4655464" y="872447"/>
-                  </a:lnTo>
-                  <a:lnTo>
-                    <a:pt x="4727086" y="881613"/>
-                  </a:lnTo>
-                  <a:lnTo>
-                    <a:pt x="4798709" y="890679"/>
-                  </a:lnTo>
-                  <a:lnTo>
-                    <a:pt x="4870331" y="899646"/>
-                  </a:lnTo>
-                  <a:lnTo>
-                    <a:pt x="4941954" y="908517"/>
-                  </a:lnTo>
-                  <a:lnTo>
-                    <a:pt x="5013576" y="917290"/>
-                  </a:lnTo>
-                  <a:lnTo>
-                    <a:pt x="5085199" y="925969"/>
-                  </a:lnTo>
-                  <a:lnTo>
-                    <a:pt x="5156821" y="934553"/>
-                  </a:lnTo>
-                  <a:lnTo>
-                    <a:pt x="5228444" y="943044"/>
-                  </a:lnTo>
-                  <a:lnTo>
-                    <a:pt x="5300066" y="951442"/>
-                  </a:lnTo>
-                  <a:lnTo>
-                    <a:pt x="5371689" y="959749"/>
-                  </a:lnTo>
-                  <a:lnTo>
-                    <a:pt x="5443311" y="967966"/>
-                  </a:lnTo>
-                  <a:lnTo>
-                    <a:pt x="5514934" y="976094"/>
-                  </a:lnTo>
-                  <a:lnTo>
-                    <a:pt x="5586557" y="984134"/>
-                  </a:lnTo>
-                  <a:lnTo>
-                    <a:pt x="5658179" y="992086"/>
-                  </a:lnTo>
-                  <a:lnTo>
-                    <a:pt x="5729802" y="999951"/>
-                  </a:lnTo>
-                  <a:lnTo>
-                    <a:pt x="5801424" y="1007731"/>
-                  </a:lnTo>
-                  <a:lnTo>
-                    <a:pt x="5873047" y="1015427"/>
-                  </a:lnTo>
-                  <a:lnTo>
-                    <a:pt x="5944669" y="1023039"/>
-                  </a:lnTo>
-                  <a:lnTo>
-                    <a:pt x="6016292" y="1030569"/>
-                  </a:lnTo>
-                  <a:lnTo>
-                    <a:pt x="6087914" y="1038016"/>
-                  </a:lnTo>
-                  <a:lnTo>
-                    <a:pt x="6159537" y="1045383"/>
-                  </a:lnTo>
-                  <a:lnTo>
-                    <a:pt x="6231159" y="1052669"/>
-                  </a:lnTo>
-                  <a:lnTo>
-                    <a:pt x="6302782" y="1059877"/>
-                  </a:lnTo>
-                  <a:lnTo>
-                    <a:pt x="6374404" y="1067006"/>
-                  </a:lnTo>
-                  <a:lnTo>
-                    <a:pt x="6446027" y="1074057"/>
-                  </a:lnTo>
-                  <a:lnTo>
-                    <a:pt x="6517649" y="1081032"/>
-                  </a:lnTo>
-                  <a:lnTo>
-                    <a:pt x="6589272" y="1087931"/>
-                  </a:lnTo>
-                  <a:lnTo>
-                    <a:pt x="6660894" y="1094756"/>
-                  </a:lnTo>
-                  <a:lnTo>
-                    <a:pt x="6732517" y="1101506"/>
-                  </a:lnTo>
-                  <a:lnTo>
-                    <a:pt x="6804139" y="1108182"/>
-                  </a:lnTo>
-                  <a:lnTo>
-                    <a:pt x="6875762" y="1114787"/>
-                  </a:lnTo>
-                  <a:lnTo>
-                    <a:pt x="6947385" y="1121319"/>
-                  </a:lnTo>
-                  <a:lnTo>
-                    <a:pt x="7019007" y="1127780"/>
-                  </a:lnTo>
-                  <a:lnTo>
-                    <a:pt x="7090630" y="1134172"/>
+                    <a:pt x="71622" y="18793"/>
+                  </a:lnTo>
+                  <a:lnTo>
+                    <a:pt x="143245" y="37381"/>
+                  </a:lnTo>
+                  <a:lnTo>
+                    <a:pt x="214867" y="55766"/>
+                  </a:lnTo>
+                  <a:lnTo>
+                    <a:pt x="286490" y="73951"/>
+                  </a:lnTo>
+                  <a:lnTo>
+                    <a:pt x="358112" y="91937"/>
+                  </a:lnTo>
+                  <a:lnTo>
+                    <a:pt x="429735" y="109727"/>
+                  </a:lnTo>
+                  <a:lnTo>
+                    <a:pt x="501357" y="127322"/>
+                  </a:lnTo>
+                  <a:lnTo>
+                    <a:pt x="572980" y="144726"/>
+                  </a:lnTo>
+                  <a:lnTo>
+                    <a:pt x="644602" y="161939"/>
+                  </a:lnTo>
+                  <a:lnTo>
+                    <a:pt x="716225" y="178965"/>
+                  </a:lnTo>
+                  <a:lnTo>
+                    <a:pt x="787847" y="195805"/>
+                  </a:lnTo>
+                  <a:lnTo>
+                    <a:pt x="859470" y="212461"/>
+                  </a:lnTo>
+                  <a:lnTo>
+                    <a:pt x="931092" y="228935"/>
+                  </a:lnTo>
+                  <a:lnTo>
+                    <a:pt x="1002715" y="245229"/>
+                  </a:lnTo>
+                  <a:lnTo>
+                    <a:pt x="1074337" y="261346"/>
+                  </a:lnTo>
+                  <a:lnTo>
+                    <a:pt x="1145960" y="277286"/>
+                  </a:lnTo>
+                  <a:lnTo>
+                    <a:pt x="1217582" y="293053"/>
+                  </a:lnTo>
+                  <a:lnTo>
+                    <a:pt x="1289205" y="308647"/>
+                  </a:lnTo>
+                  <a:lnTo>
+                    <a:pt x="1360827" y="324072"/>
+                  </a:lnTo>
+                  <a:lnTo>
+                    <a:pt x="1432450" y="339327"/>
+                  </a:lnTo>
+                  <a:lnTo>
+                    <a:pt x="1504073" y="354417"/>
+                  </a:lnTo>
+                  <a:lnTo>
+                    <a:pt x="1575695" y="369341"/>
+                  </a:lnTo>
+                  <a:lnTo>
+                    <a:pt x="1647318" y="384103"/>
+                  </a:lnTo>
+                  <a:lnTo>
+                    <a:pt x="1718940" y="398704"/>
+                  </a:lnTo>
+                  <a:lnTo>
+                    <a:pt x="1790563" y="413145"/>
+                  </a:lnTo>
+                  <a:lnTo>
+                    <a:pt x="1862185" y="427429"/>
+                  </a:lnTo>
+                  <a:lnTo>
+                    <a:pt x="1933808" y="441556"/>
+                  </a:lnTo>
+                  <a:lnTo>
+                    <a:pt x="2005430" y="455530"/>
+                  </a:lnTo>
+                  <a:lnTo>
+                    <a:pt x="2077053" y="469351"/>
+                  </a:lnTo>
+                  <a:lnTo>
+                    <a:pt x="2148675" y="483021"/>
+                  </a:lnTo>
+                  <a:lnTo>
+                    <a:pt x="2220298" y="496542"/>
+                  </a:lnTo>
+                  <a:lnTo>
+                    <a:pt x="2291920" y="509915"/>
+                  </a:lnTo>
+                  <a:lnTo>
+                    <a:pt x="2363543" y="523142"/>
+                  </a:lnTo>
+                  <a:lnTo>
+                    <a:pt x="2435165" y="536225"/>
+                  </a:lnTo>
+                  <a:lnTo>
+                    <a:pt x="2506788" y="549166"/>
+                  </a:lnTo>
+                  <a:lnTo>
+                    <a:pt x="2578410" y="561964"/>
+                  </a:lnTo>
+                  <a:lnTo>
+                    <a:pt x="2650033" y="574624"/>
+                  </a:lnTo>
+                  <a:lnTo>
+                    <a:pt x="2721655" y="587145"/>
+                  </a:lnTo>
+                  <a:lnTo>
+                    <a:pt x="2793278" y="599529"/>
+                  </a:lnTo>
+                  <a:lnTo>
+                    <a:pt x="2864901" y="611778"/>
+                  </a:lnTo>
+                  <a:lnTo>
+                    <a:pt x="2936523" y="623894"/>
+                  </a:lnTo>
+                  <a:lnTo>
+                    <a:pt x="3008146" y="635877"/>
+                  </a:lnTo>
+                  <a:lnTo>
+                    <a:pt x="3079768" y="647729"/>
+                  </a:lnTo>
+                  <a:lnTo>
+                    <a:pt x="3151391" y="659452"/>
+                  </a:lnTo>
+                  <a:lnTo>
+                    <a:pt x="3223013" y="671047"/>
+                  </a:lnTo>
+                  <a:lnTo>
+                    <a:pt x="3294636" y="682516"/>
+                  </a:lnTo>
+                  <a:lnTo>
+                    <a:pt x="3366258" y="693859"/>
+                  </a:lnTo>
+                  <a:lnTo>
+                    <a:pt x="3437881" y="705079"/>
+                  </a:lnTo>
+                  <a:lnTo>
+                    <a:pt x="3509503" y="716176"/>
+                  </a:lnTo>
+                  <a:lnTo>
+                    <a:pt x="3581126" y="727151"/>
+                  </a:lnTo>
+                  <a:lnTo>
+                    <a:pt x="3652748" y="738008"/>
+                  </a:lnTo>
+                  <a:lnTo>
+                    <a:pt x="3724371" y="748745"/>
+                  </a:lnTo>
+                  <a:lnTo>
+                    <a:pt x="3795993" y="759366"/>
+                  </a:lnTo>
+                  <a:lnTo>
+                    <a:pt x="3867616" y="769870"/>
+                  </a:lnTo>
+                  <a:lnTo>
+                    <a:pt x="3939238" y="780260"/>
+                  </a:lnTo>
+                  <a:lnTo>
+                    <a:pt x="4010861" y="790536"/>
+                  </a:lnTo>
+                  <a:lnTo>
+                    <a:pt x="4082483" y="800700"/>
+                  </a:lnTo>
+                  <a:lnTo>
+                    <a:pt x="4154106" y="810754"/>
+                  </a:lnTo>
+                  <a:lnTo>
+                    <a:pt x="4225729" y="820697"/>
+                  </a:lnTo>
+                  <a:lnTo>
+                    <a:pt x="4297351" y="830532"/>
+                  </a:lnTo>
+                  <a:lnTo>
+                    <a:pt x="4368974" y="840260"/>
+                  </a:lnTo>
+                  <a:lnTo>
+                    <a:pt x="4440596" y="849881"/>
+                  </a:lnTo>
+                  <a:lnTo>
+                    <a:pt x="4512219" y="859398"/>
+                  </a:lnTo>
+                  <a:lnTo>
+                    <a:pt x="4583841" y="868810"/>
+                  </a:lnTo>
+                  <a:lnTo>
+                    <a:pt x="4655464" y="878120"/>
+                  </a:lnTo>
+                  <a:lnTo>
+                    <a:pt x="4727086" y="887328"/>
+                  </a:lnTo>
+                  <a:lnTo>
+                    <a:pt x="4798709" y="896436"/>
+                  </a:lnTo>
+                  <a:lnTo>
+                    <a:pt x="4870331" y="905444"/>
+                  </a:lnTo>
+                  <a:lnTo>
+                    <a:pt x="4941954" y="914354"/>
+                  </a:lnTo>
+                  <a:lnTo>
+                    <a:pt x="5013576" y="923167"/>
+                  </a:lnTo>
+                  <a:lnTo>
+                    <a:pt x="5085199" y="931884"/>
+                  </a:lnTo>
+                  <a:lnTo>
+                    <a:pt x="5156821" y="940505"/>
+                  </a:lnTo>
+                  <a:lnTo>
+                    <a:pt x="5228444" y="949032"/>
+                  </a:lnTo>
+                  <a:lnTo>
+                    <a:pt x="5300066" y="957466"/>
+                  </a:lnTo>
+                  <a:lnTo>
+                    <a:pt x="5371689" y="965808"/>
+                  </a:lnTo>
+                  <a:lnTo>
+                    <a:pt x="5443311" y="974059"/>
+                  </a:lnTo>
+                  <a:lnTo>
+                    <a:pt x="5514934" y="982220"/>
+                  </a:lnTo>
+                  <a:lnTo>
+                    <a:pt x="5586557" y="990292"/>
+                  </a:lnTo>
+                  <a:lnTo>
+                    <a:pt x="5658179" y="998276"/>
+                  </a:lnTo>
+                  <a:lnTo>
+                    <a:pt x="5729802" y="1006173"/>
+                  </a:lnTo>
+                  <a:lnTo>
+                    <a:pt x="5801424" y="1013983"/>
+                  </a:lnTo>
+                  <a:lnTo>
+                    <a:pt x="5873047" y="1021708"/>
+                  </a:lnTo>
+                  <a:lnTo>
+                    <a:pt x="5944669" y="1029349"/>
+                  </a:lnTo>
+                  <a:lnTo>
+                    <a:pt x="6016292" y="1036907"/>
+                  </a:lnTo>
+                  <a:lnTo>
+                    <a:pt x="6087914" y="1044382"/>
+                  </a:lnTo>
+                  <a:lnTo>
+                    <a:pt x="6159537" y="1051775"/>
+                  </a:lnTo>
+                  <a:lnTo>
+                    <a:pt x="6231159" y="1059088"/>
+                  </a:lnTo>
+                  <a:lnTo>
+                    <a:pt x="6302782" y="1066321"/>
+                  </a:lnTo>
+                  <a:lnTo>
+                    <a:pt x="6374404" y="1073475"/>
+                  </a:lnTo>
+                  <a:lnTo>
+                    <a:pt x="6446027" y="1080550"/>
+                  </a:lnTo>
+                  <a:lnTo>
+                    <a:pt x="6517649" y="1087549"/>
+                  </a:lnTo>
+                  <a:lnTo>
+                    <a:pt x="6589272" y="1094471"/>
+                  </a:lnTo>
+                  <a:lnTo>
+                    <a:pt x="6660894" y="1101318"/>
+                  </a:lnTo>
+                  <a:lnTo>
+                    <a:pt x="6732517" y="1108090"/>
+                  </a:lnTo>
+                  <a:lnTo>
+                    <a:pt x="6804139" y="1114788"/>
+                  </a:lnTo>
+                  <a:lnTo>
+                    <a:pt x="6875762" y="1121413"/>
+                  </a:lnTo>
+                  <a:lnTo>
+                    <a:pt x="6947385" y="1127965"/>
+                  </a:lnTo>
+                  <a:lnTo>
+                    <a:pt x="7019007" y="1134446"/>
+                  </a:lnTo>
+                  <a:lnTo>
+                    <a:pt x="7090630" y="1140856"/>
                   </a:lnTo>
                 </a:path>
               </a:pathLst>
@@ -5371,7 +5371,7 @@
                   <a:latin typeface="Helvetica"/>
                   <a:cs typeface="Helvetica"/>
                 </a:rPr>
-                <a:t>subHR per 10 mL/min decline: 1.14 (1.07-1.21), p_Bonf = &lt;0.001 (n = 6)  |  per IQR decline (Δ = 23.3): 1.36 (1.18-1.57)  |  IQR: [-12.8, 10.5]</a:t>
+                <a:t>subHR per 10 mL/min decline: 1.14 (1.07-1.22), p_Bonf = &lt;0.001 (n = 6)  |  per IQR decline (Δ = 23.3): 1.36 (1.18-1.57)  |  IQR: [-12.8, 10.5]</a:t>
               </a:r>
             </a:p>
           </p:txBody>
